--- a/public/fun/pack/pptx/talk/발표템플릿_26_사업제안_코스모스신작로.pptx
+++ b/public/fun/pack/pptx/talk/발표템플릿_26_사업제안_코스모스신작로.pptx
@@ -3286,6 +3286,14 @@
 <file path=ppt/slides/slide1.xml><?xml version="1.0" encoding="utf-8"?>
 <p:sld xmlns:a="http://schemas.openxmlformats.org/drawingml/2006/main" xmlns:p="http://schemas.openxmlformats.org/presentationml/2006/main" xmlns:r="http://schemas.openxmlformats.org/officeDocument/2006/relationships">
   <p:cSld>
+    <p:bg>
+      <p:bgPr>
+        <a:solidFill>
+          <a:srgbClr val="49273E"/>
+        </a:solidFill>
+        <a:effectLst/>
+      </p:bgPr>
+    </p:bg>
     <p:spTree>
       <p:nvGrpSpPr>
         <p:cNvPr id="1" name=""/>
@@ -3293,30 +3301,140 @@
         <p:nvPr/>
       </p:nvGrpSpPr>
       <p:grpSpPr/>
-      <p:pic>
-        <p:nvPicPr>
-          <p:cNvPr id="3" name="표지 그림" descr="talk-26.jpg"/>
-          <p:cNvPicPr>
-            <a:picLocks noChangeAspect="1"/>
-          </p:cNvPicPr>
+      <p:sp>
+        <p:nvSpPr>
+          <p:cNvPr id="3" name="장식"/>
+          <p:cNvSpPr/>
           <p:nvPr/>
-        </p:nvPicPr>
-        <p:blipFill>
-          <a:blip r:embed="rId2"/>
-          <a:stretch>
-            <a:fillRect/>
-          </a:stretch>
-        </p:blipFill>
-        <p:spPr>
-          <a:xfrm>
-            <a:off x="0" y="0"/>
-            <a:ext cx="12191695" cy="6858000"/>
+        </p:nvSpPr>
+        <p:spPr>
+          <a:xfrm>
+            <a:off x="6827349" y="2057400"/>
+            <a:ext cx="1463003" cy="4800600"/>
+          </a:xfrm>
+          <a:prstGeom prst="round2SameRect">
+            <a:avLst>
+              <a:gd name="adj1" fmla="val 50000"/>
+              <a:gd name="adj2" fmla="val 0"/>
+            </a:avLst>
+          </a:prstGeom>
+          <a:solidFill>
+            <a:srgbClr val="A65C8D"/>
+          </a:solidFill>
+          <a:ln>
+            <a:noFill/>
+          </a:ln>
+        </p:spPr>
+        <p:txBody>
+          <a:bodyPr rtlCol="0" anchor="ctr"/>
+          <a:lstStyle/>
+          <a:p>
+            <a:pPr algn="ctr"/>
+          </a:p>
+        </p:txBody>
+      </p:sp>
+      <p:sp>
+        <p:nvSpPr>
+          <p:cNvPr id="4" name="장식"/>
+          <p:cNvSpPr/>
+          <p:nvPr/>
+        </p:nvSpPr>
+        <p:spPr>
+          <a:xfrm>
+            <a:off x="8412269" y="1577339"/>
+            <a:ext cx="1463003" cy="5280660"/>
+          </a:xfrm>
+          <a:prstGeom prst="round2SameRect">
+            <a:avLst>
+              <a:gd name="adj1" fmla="val 50000"/>
+              <a:gd name="adj2" fmla="val 0"/>
+            </a:avLst>
+          </a:prstGeom>
+          <a:solidFill>
+            <a:srgbClr val="D879B8"/>
+          </a:solidFill>
+          <a:ln>
+            <a:noFill/>
+          </a:ln>
+        </p:spPr>
+        <p:txBody>
+          <a:bodyPr rtlCol="0" anchor="ctr"/>
+          <a:lstStyle/>
+          <a:p>
+            <a:pPr algn="ctr"/>
+          </a:p>
+        </p:txBody>
+      </p:sp>
+      <p:sp>
+        <p:nvSpPr>
+          <p:cNvPr id="5" name="장식"/>
+          <p:cNvSpPr/>
+          <p:nvPr/>
+        </p:nvSpPr>
+        <p:spPr>
+          <a:xfrm>
+            <a:off x="9997190" y="1097279"/>
+            <a:ext cx="1463003" cy="5760720"/>
+          </a:xfrm>
+          <a:prstGeom prst="round2SameRect">
+            <a:avLst>
+              <a:gd name="adj1" fmla="val 50000"/>
+              <a:gd name="adj2" fmla="val 0"/>
+            </a:avLst>
+          </a:prstGeom>
+          <a:solidFill>
+            <a:srgbClr val="A65C8D"/>
+          </a:solidFill>
+          <a:ln>
+            <a:noFill/>
+          </a:ln>
+        </p:spPr>
+        <p:txBody>
+          <a:bodyPr rtlCol="0" anchor="ctr"/>
+          <a:lstStyle/>
+          <a:p>
+            <a:pPr algn="ctr"/>
+          </a:p>
+        </p:txBody>
+      </p:sp>
+      <p:sp>
+        <p:nvSpPr>
+          <p:cNvPr id="6" name="라벨"/>
+          <p:cNvSpPr txBox="1"/>
+          <p:nvPr/>
+        </p:nvSpPr>
+        <p:spPr>
+          <a:xfrm>
+            <a:off x="822960" y="2148840"/>
+            <a:ext cx="5608179" cy="274320"/>
           </a:xfrm>
           <a:prstGeom prst="rect">
             <a:avLst/>
           </a:prstGeom>
-        </p:spPr>
-      </p:pic>
+          <a:noFill/>
+        </p:spPr>
+        <p:txBody>
+          <a:bodyPr wrap="square" lIns="54864" rIns="54864" tIns="27432" bIns="27432" anchor="t">
+            <a:noAutofit/>
+          </a:bodyPr>
+          <a:lstStyle/>
+          <a:p>
+            <a:pPr algn="l">
+              <a:lnSpc>
+                <a:spcPct val="115000"/>
+              </a:lnSpc>
+            </a:pPr>
+            <a:r>
+              <a:rPr sz="1000" b="1" i="0" spc="250">
+                <a:solidFill>
+                  <a:srgbClr val="FFFFFF"/>
+                </a:solidFill>
+              </a:rPr>
+              <a:t>PRESENTATION</a:t>
+            </a:r>
+          </a:p>
+        </p:txBody>
+      </p:sp>
       <p:sp>
         <p:nvSpPr>
           <p:cNvPr id="2" name="Title 1"/>
@@ -3329,8 +3447,8 @@
         </p:nvSpPr>
         <p:spPr>
           <a:xfrm>
-            <a:off x="853418" y="2057400"/>
-            <a:ext cx="6095847" cy="1554480"/>
+            <a:off x="822960" y="2606040"/>
+            <a:ext cx="5608179" cy="1188720"/>
           </a:xfrm>
         </p:spPr>
         <p:txBody>
@@ -3345,9 +3463,9 @@
               </a:lnSpc>
             </a:pPr>
             <a:r>
-              <a:rPr sz="3600" b="1" i="0">
+              <a:rPr sz="4000" b="1" i="0">
                 <a:solidFill>
-                  <a:srgbClr val="85326A"/>
+                  <a:srgbClr val="FFFFFF"/>
                 </a:solidFill>
               </a:rPr>
               <a:t>발표 제목을 입력하세요</a:t>
@@ -3357,14 +3475,14 @@
       </p:sp>
       <p:sp>
         <p:nvSpPr>
-          <p:cNvPr id="4" name="한 줄 문구"/>
+          <p:cNvPr id="7" name="한 줄 문구"/>
           <p:cNvSpPr txBox="1"/>
           <p:nvPr/>
         </p:nvSpPr>
         <p:spPr>
           <a:xfrm>
-            <a:off x="853418" y="3749039"/>
-            <a:ext cx="6095847" cy="822960"/>
+            <a:off x="822960" y="3886200"/>
+            <a:ext cx="5608179" cy="822960"/>
           </a:xfrm>
           <a:prstGeom prst="rect">
             <a:avLst/>
@@ -3383,26 +3501,26 @@
               </a:lnSpc>
             </a:pPr>
             <a:r>
-              <a:rPr sz="1700" b="0" i="1">
+              <a:rPr sz="1700" b="0" i="0">
                 <a:solidFill>
-                  <a:srgbClr val="85326A"/>
+                  <a:srgbClr val="FFFFFF"/>
                 </a:solidFill>
               </a:rPr>
-              <a:t>하반기 마무리 전에 결정할 안건입니다</a:t>
-            </a:r>
-          </a:p>
-        </p:txBody>
-      </p:sp>
-      <p:sp>
-        <p:nvSpPr>
-          <p:cNvPr id="5" name="안내 문구"/>
+              <a:t>마무리 전에 결정할 안건입니다</a:t>
+            </a:r>
+          </a:p>
+        </p:txBody>
+      </p:sp>
+      <p:sp>
+        <p:nvSpPr>
+          <p:cNvPr id="8" name="안내 문구"/>
           <p:cNvSpPr txBox="1"/>
           <p:nvPr/>
         </p:nvSpPr>
         <p:spPr>
           <a:xfrm>
-            <a:off x="853418" y="4617720"/>
-            <a:ext cx="6095847" cy="914400"/>
+            <a:off x="822960" y="4754880"/>
+            <a:ext cx="5608179" cy="914400"/>
           </a:xfrm>
           <a:prstGeom prst="rect">
             <a:avLst/>
@@ -3423,7 +3541,7 @@
             <a:r>
               <a:rPr sz="1400" b="0" i="0">
                 <a:solidFill>
-                  <a:srgbClr val="666666"/>
+                  <a:srgbClr val="FFFFFF"/>
                 </a:solidFill>
               </a:rPr>
               <a:t>사업 제안 · 발표자 이름</a:t>
@@ -3438,10 +3556,10 @@
             <a:r>
               <a:rPr sz="1400" b="0" i="0">
                 <a:solidFill>
-                  <a:srgbClr val="666666"/>
+                  <a:srgbClr val="FFFFFF"/>
                 </a:solidFill>
               </a:rPr>
-              <a:t>2027. 00. 00</a:t>
+              <a:t>날짜 입력</a:t>
             </a:r>
           </a:p>
         </p:txBody>
@@ -3460,7 +3578,7 @@
     <p:bg>
       <p:bgPr>
         <a:solidFill>
-          <a:srgbClr val="F9F0F6"/>
+          <a:srgbClr val="FBECF6"/>
         </a:solidFill>
         <a:effectLst/>
       </p:bgPr>
@@ -3480,14 +3598,14 @@
         </p:nvSpPr>
         <p:spPr>
           <a:xfrm>
-            <a:off x="0" y="6035040"/>
-            <a:ext cx="1737360" cy="822960"/>
-          </a:xfrm>
-          <a:prstGeom prst="rtTriangle">
+            <a:off x="640080" y="566928"/>
+            <a:ext cx="10911535" cy="10972"/>
+          </a:xfrm>
+          <a:prstGeom prst="rect">
             <a:avLst/>
           </a:prstGeom>
           <a:solidFill>
-            <a:srgbClr val="F0D1E5"/>
+            <a:srgbClr val="26231F"/>
           </a:solidFill>
           <a:ln>
             <a:noFill/>
@@ -3503,20 +3621,58 @@
       </p:sp>
       <p:sp>
         <p:nvSpPr>
-          <p:cNvPr id="4" name="장식"/>
+          <p:cNvPr id="4" name="상단 라벨"/>
+          <p:cNvSpPr txBox="1"/>
+          <p:nvPr/>
+        </p:nvSpPr>
+        <p:spPr>
+          <a:xfrm>
+            <a:off x="640080" y="237744"/>
+            <a:ext cx="5486400" cy="274320"/>
+          </a:xfrm>
+          <a:prstGeom prst="rect">
+            <a:avLst/>
+          </a:prstGeom>
+          <a:noFill/>
+        </p:spPr>
+        <p:txBody>
+          <a:bodyPr wrap="square" lIns="54864" rIns="54864" tIns="27432" bIns="27432" anchor="ctr">
+            <a:noAutofit/>
+          </a:bodyPr>
+          <a:lstStyle/>
+          <a:p>
+            <a:pPr algn="l">
+              <a:lnSpc>
+                <a:spcPct val="115000"/>
+              </a:lnSpc>
+            </a:pPr>
+            <a:r>
+              <a:rPr sz="900" b="1" i="0" spc="250">
+                <a:solidFill>
+                  <a:srgbClr val="26231F"/>
+                </a:solidFill>
+              </a:rPr>
+              <a:t>PRESENTATION</a:t>
+            </a:r>
+          </a:p>
+        </p:txBody>
+      </p:sp>
+      <p:sp>
+        <p:nvSpPr>
+          <p:cNvPr id="5" name="포인트"/>
           <p:cNvSpPr/>
           <p:nvPr/>
         </p:nvSpPr>
         <p:spPr>
-          <a:xfrm>
-            <a:off x="0" y="6400800"/>
-            <a:ext cx="914400" cy="457200"/>
-          </a:xfrm>
-          <a:prstGeom prst="rtTriangle">
+          <a:xfrm rot="18900000">
+            <a:off x="11204143" y="246888"/>
+            <a:ext cx="237744" cy="237744"/>
+          </a:xfrm>
+          <a:prstGeom prst="teardrop">
             <a:avLst/>
           </a:prstGeom>
           <a:solidFill>
-            <a:srgbClr val="C15CA0"/>
+            <a:srgbClr val="D879B8"/>
           </a:solidFill>
           <a:ln>
             <a:noFill/>
@@ -3542,8 +3698,8 @@
         </p:nvSpPr>
         <p:spPr>
           <a:xfrm>
-            <a:off x="640080" y="457200"/>
-            <a:ext cx="9722815" cy="868680"/>
+            <a:off x="640080" y="731520"/>
+            <a:ext cx="10911535" cy="822960"/>
           </a:xfrm>
         </p:spPr>
         <p:txBody>
@@ -3560,7 +3716,7 @@
             <a:r>
               <a:rPr sz="3000" b="1" i="0">
                 <a:solidFill>
-                  <a:srgbClr val="85326A"/>
+                  <a:srgbClr val="26231F"/>
                 </a:solidFill>
               </a:rPr>
               <a:t>목차</a:t>
@@ -3570,27 +3726,25 @@
       </p:sp>
       <p:sp>
         <p:nvSpPr>
-          <p:cNvPr id="5" name="줄 1"/>
+          <p:cNvPr id="6" name="줄 1"/>
           <p:cNvSpPr/>
           <p:nvPr/>
         </p:nvSpPr>
         <p:spPr>
           <a:xfrm>
-            <a:off x="640080" y="1600200"/>
+            <a:off x="640080" y="1783080"/>
             <a:ext cx="10911535" cy="914400"/>
           </a:xfrm>
           <a:prstGeom prst="roundRect">
             <a:avLst>
-              <a:gd name="adj" fmla="val 8000"/>
+              <a:gd name="adj" fmla="val 4000"/>
             </a:avLst>
           </a:prstGeom>
           <a:solidFill>
-            <a:srgbClr val="F9F0F6"/>
+            <a:srgbClr val="FBECF6"/>
           </a:solidFill>
-          <a:ln w="12700">
-            <a:solidFill>
-              <a:srgbClr val="F0D1E5"/>
-            </a:solidFill>
+          <a:ln>
+            <a:noFill/>
           </a:ln>
         </p:spPr>
         <p:txBody>
@@ -3603,20 +3757,49 @@
       </p:sp>
       <p:sp>
         <p:nvSpPr>
-          <p:cNvPr id="6" name="번호 1"/>
+          <p:cNvPr id="7" name="포인트 막대"/>
           <p:cNvSpPr/>
           <p:nvPr/>
         </p:nvSpPr>
         <p:spPr>
           <a:xfrm>
-            <a:off x="822959" y="1828800"/>
+            <a:off x="640080" y="1892807"/>
+            <a:ext cx="54864" cy="694944"/>
+          </a:xfrm>
+          <a:prstGeom prst="rect">
+            <a:avLst/>
+          </a:prstGeom>
+          <a:solidFill>
+            <a:srgbClr val="D879B8"/>
+          </a:solidFill>
+          <a:ln>
+            <a:noFill/>
+          </a:ln>
+        </p:spPr>
+        <p:txBody>
+          <a:bodyPr rtlCol="0" anchor="ctr"/>
+          <a:lstStyle/>
+          <a:p>
+            <a:pPr algn="ctr"/>
+          </a:p>
+        </p:txBody>
+      </p:sp>
+      <p:sp>
+        <p:nvSpPr>
+          <p:cNvPr id="8" name="번호 1"/>
+          <p:cNvSpPr/>
+          <p:nvPr/>
+        </p:nvSpPr>
+        <p:spPr>
+          <a:xfrm>
+            <a:off x="822959" y="2011680"/>
             <a:ext cx="457200" cy="457200"/>
           </a:xfrm>
           <a:prstGeom prst="ellipse">
             <a:avLst/>
           </a:prstGeom>
           <a:solidFill>
-            <a:srgbClr val="C15CA0"/>
+            <a:srgbClr val="D879B8"/>
           </a:solidFill>
           <a:ln>
             <a:noFill/>
@@ -3636,7 +3819,7 @@
             <a:r>
               <a:rPr sz="1600" b="1" i="0">
                 <a:solidFill>
-                  <a:srgbClr val="FFFFFF"/>
+                  <a:srgbClr val="26231F"/>
                 </a:solidFill>
               </a:rPr>
               <a:t>1</a:t>
@@ -3646,13 +3829,13 @@
       </p:sp>
       <p:sp>
         <p:nvSpPr>
-          <p:cNvPr id="7" name="TextBox 6"/>
+          <p:cNvPr id="9" name="TextBox 8"/>
           <p:cNvSpPr txBox="1"/>
           <p:nvPr/>
         </p:nvSpPr>
         <p:spPr>
           <a:xfrm>
-            <a:off x="1508760" y="1645920"/>
+            <a:off x="1508760" y="1828800"/>
             <a:ext cx="2743200" cy="822960"/>
           </a:xfrm>
           <a:prstGeom prst="rect">
@@ -3674,7 +3857,7 @@
             <a:r>
               <a:rPr sz="1800" b="1" i="0">
                 <a:solidFill>
-                  <a:srgbClr val="85326A"/>
+                  <a:srgbClr val="49273E"/>
                 </a:solidFill>
               </a:rPr>
               <a:t>문제와 기회</a:t>
@@ -3684,13 +3867,13 @@
       </p:sp>
       <p:sp>
         <p:nvSpPr>
-          <p:cNvPr id="8" name="TextBox 7"/>
+          <p:cNvPr id="10" name="TextBox 9"/>
           <p:cNvSpPr txBox="1"/>
           <p:nvPr/>
         </p:nvSpPr>
         <p:spPr>
           <a:xfrm>
-            <a:off x="4297680" y="1645920"/>
+            <a:off x="4297680" y="1828800"/>
             <a:ext cx="7071055" cy="822960"/>
           </a:xfrm>
           <a:prstGeom prst="rect">
@@ -3712,7 +3895,7 @@
             <a:r>
               <a:rPr sz="1500" b="0" i="0">
                 <a:solidFill>
-                  <a:srgbClr val="2B2B2B"/>
+                  <a:srgbClr val="26231F"/>
                 </a:solidFill>
               </a:rPr>
               <a:t>한 줄로 내용을 적어 주세요</a:t>
@@ -3722,27 +3905,25 @@
       </p:sp>
       <p:sp>
         <p:nvSpPr>
-          <p:cNvPr id="9" name="줄 2"/>
+          <p:cNvPr id="11" name="줄 2"/>
           <p:cNvSpPr/>
           <p:nvPr/>
         </p:nvSpPr>
         <p:spPr>
           <a:xfrm>
-            <a:off x="640080" y="2651760"/>
+            <a:off x="640080" y="2834639"/>
             <a:ext cx="10911535" cy="914400"/>
           </a:xfrm>
           <a:prstGeom prst="roundRect">
             <a:avLst>
-              <a:gd name="adj" fmla="val 8000"/>
+              <a:gd name="adj" fmla="val 4000"/>
             </a:avLst>
           </a:prstGeom>
           <a:solidFill>
-            <a:srgbClr val="F9F0F6"/>
+            <a:srgbClr val="FBECF6"/>
           </a:solidFill>
-          <a:ln w="12700">
-            <a:solidFill>
-              <a:srgbClr val="F0D1E5"/>
-            </a:solidFill>
+          <a:ln>
+            <a:noFill/>
           </a:ln>
         </p:spPr>
         <p:txBody>
@@ -3755,20 +3936,49 @@
       </p:sp>
       <p:sp>
         <p:nvSpPr>
-          <p:cNvPr id="10" name="번호 2"/>
+          <p:cNvPr id="12" name="포인트 막대"/>
           <p:cNvSpPr/>
           <p:nvPr/>
         </p:nvSpPr>
         <p:spPr>
           <a:xfrm>
-            <a:off x="822959" y="2880360"/>
+            <a:off x="640080" y="2944368"/>
+            <a:ext cx="54864" cy="694944"/>
+          </a:xfrm>
+          <a:prstGeom prst="rect">
+            <a:avLst/>
+          </a:prstGeom>
+          <a:solidFill>
+            <a:srgbClr val="D879B8"/>
+          </a:solidFill>
+          <a:ln>
+            <a:noFill/>
+          </a:ln>
+        </p:spPr>
+        <p:txBody>
+          <a:bodyPr rtlCol="0" anchor="ctr"/>
+          <a:lstStyle/>
+          <a:p>
+            <a:pPr algn="ctr"/>
+          </a:p>
+        </p:txBody>
+      </p:sp>
+      <p:sp>
+        <p:nvSpPr>
+          <p:cNvPr id="13" name="번호 2"/>
+          <p:cNvSpPr/>
+          <p:nvPr/>
+        </p:nvSpPr>
+        <p:spPr>
+          <a:xfrm>
+            <a:off x="822959" y="3063239"/>
             <a:ext cx="457200" cy="457200"/>
           </a:xfrm>
           <a:prstGeom prst="ellipse">
             <a:avLst/>
           </a:prstGeom>
           <a:solidFill>
-            <a:srgbClr val="C15CA0"/>
+            <a:srgbClr val="D879B8"/>
           </a:solidFill>
           <a:ln>
             <a:noFill/>
@@ -3788,7 +3998,7 @@
             <a:r>
               <a:rPr sz="1600" b="1" i="0">
                 <a:solidFill>
-                  <a:srgbClr val="FFFFFF"/>
+                  <a:srgbClr val="26231F"/>
                 </a:solidFill>
               </a:rPr>
               <a:t>2</a:t>
@@ -3798,13 +4008,13 @@
       </p:sp>
       <p:sp>
         <p:nvSpPr>
-          <p:cNvPr id="11" name="TextBox 10"/>
+          <p:cNvPr id="14" name="TextBox 13"/>
           <p:cNvSpPr txBox="1"/>
           <p:nvPr/>
         </p:nvSpPr>
         <p:spPr>
           <a:xfrm>
-            <a:off x="1508760" y="2697479"/>
+            <a:off x="1508760" y="2880359"/>
             <a:ext cx="2743200" cy="822960"/>
           </a:xfrm>
           <a:prstGeom prst="rect">
@@ -3826,7 +4036,7 @@
             <a:r>
               <a:rPr sz="1800" b="1" i="0">
                 <a:solidFill>
-                  <a:srgbClr val="85326A"/>
+                  <a:srgbClr val="49273E"/>
                 </a:solidFill>
               </a:rPr>
               <a:t>해결 방법</a:t>
@@ -3836,13 +4046,13 @@
       </p:sp>
       <p:sp>
         <p:nvSpPr>
-          <p:cNvPr id="12" name="TextBox 11"/>
+          <p:cNvPr id="15" name="TextBox 14"/>
           <p:cNvSpPr txBox="1"/>
           <p:nvPr/>
         </p:nvSpPr>
         <p:spPr>
           <a:xfrm>
-            <a:off x="4297680" y="2697479"/>
+            <a:off x="4297680" y="2880359"/>
             <a:ext cx="7071055" cy="822960"/>
           </a:xfrm>
           <a:prstGeom prst="rect">
@@ -3864,7 +4074,7 @@
             <a:r>
               <a:rPr sz="1500" b="0" i="0">
                 <a:solidFill>
-                  <a:srgbClr val="2B2B2B"/>
+                  <a:srgbClr val="26231F"/>
                 </a:solidFill>
               </a:rPr>
               <a:t>한 줄로 내용을 적어 주세요</a:t>
@@ -3874,27 +4084,25 @@
       </p:sp>
       <p:sp>
         <p:nvSpPr>
-          <p:cNvPr id="13" name="줄 3"/>
+          <p:cNvPr id="16" name="줄 3"/>
           <p:cNvSpPr/>
           <p:nvPr/>
         </p:nvSpPr>
         <p:spPr>
           <a:xfrm>
-            <a:off x="640080" y="3703320"/>
+            <a:off x="640080" y="3886200"/>
             <a:ext cx="10911535" cy="914400"/>
           </a:xfrm>
           <a:prstGeom prst="roundRect">
             <a:avLst>
-              <a:gd name="adj" fmla="val 8000"/>
+              <a:gd name="adj" fmla="val 4000"/>
             </a:avLst>
           </a:prstGeom>
           <a:solidFill>
-            <a:srgbClr val="F9F0F6"/>
+            <a:srgbClr val="FBECF6"/>
           </a:solidFill>
-          <a:ln w="12700">
-            <a:solidFill>
-              <a:srgbClr val="F0D1E5"/>
-            </a:solidFill>
+          <a:ln>
+            <a:noFill/>
           </a:ln>
         </p:spPr>
         <p:txBody>
@@ -3907,20 +4115,49 @@
       </p:sp>
       <p:sp>
         <p:nvSpPr>
-          <p:cNvPr id="14" name="번호 3"/>
+          <p:cNvPr id="17" name="포인트 막대"/>
           <p:cNvSpPr/>
           <p:nvPr/>
         </p:nvSpPr>
         <p:spPr>
           <a:xfrm>
-            <a:off x="822959" y="3931920"/>
+            <a:off x="640080" y="3995928"/>
+            <a:ext cx="54864" cy="694944"/>
+          </a:xfrm>
+          <a:prstGeom prst="rect">
+            <a:avLst/>
+          </a:prstGeom>
+          <a:solidFill>
+            <a:srgbClr val="D879B8"/>
+          </a:solidFill>
+          <a:ln>
+            <a:noFill/>
+          </a:ln>
+        </p:spPr>
+        <p:txBody>
+          <a:bodyPr rtlCol="0" anchor="ctr"/>
+          <a:lstStyle/>
+          <a:p>
+            <a:pPr algn="ctr"/>
+          </a:p>
+        </p:txBody>
+      </p:sp>
+      <p:sp>
+        <p:nvSpPr>
+          <p:cNvPr id="18" name="번호 3"/>
+          <p:cNvSpPr/>
+          <p:nvPr/>
+        </p:nvSpPr>
+        <p:spPr>
+          <a:xfrm>
+            <a:off x="822959" y="4114800"/>
             <a:ext cx="457200" cy="457200"/>
           </a:xfrm>
           <a:prstGeom prst="ellipse">
             <a:avLst/>
           </a:prstGeom>
           <a:solidFill>
-            <a:srgbClr val="C15CA0"/>
+            <a:srgbClr val="D879B8"/>
           </a:solidFill>
           <a:ln>
             <a:noFill/>
@@ -3940,7 +4177,7 @@
             <a:r>
               <a:rPr sz="1600" b="1" i="0">
                 <a:solidFill>
-                  <a:srgbClr val="FFFFFF"/>
+                  <a:srgbClr val="26231F"/>
                 </a:solidFill>
               </a:rPr>
               <a:t>3</a:t>
@@ -3950,13 +4187,13 @@
       </p:sp>
       <p:sp>
         <p:nvSpPr>
-          <p:cNvPr id="15" name="TextBox 14"/>
+          <p:cNvPr id="19" name="TextBox 18"/>
           <p:cNvSpPr txBox="1"/>
           <p:nvPr/>
         </p:nvSpPr>
         <p:spPr>
           <a:xfrm>
-            <a:off x="1508760" y="3749039"/>
+            <a:off x="1508760" y="3931920"/>
             <a:ext cx="2743200" cy="822960"/>
           </a:xfrm>
           <a:prstGeom prst="rect">
@@ -3978,7 +4215,7 @@
             <a:r>
               <a:rPr sz="1800" b="1" i="0">
                 <a:solidFill>
-                  <a:srgbClr val="85326A"/>
+                  <a:srgbClr val="49273E"/>
                 </a:solidFill>
               </a:rPr>
               <a:t>기대 효과</a:t>
@@ -3988,13 +4225,13 @@
       </p:sp>
       <p:sp>
         <p:nvSpPr>
-          <p:cNvPr id="16" name="TextBox 15"/>
+          <p:cNvPr id="20" name="TextBox 19"/>
           <p:cNvSpPr txBox="1"/>
           <p:nvPr/>
         </p:nvSpPr>
         <p:spPr>
           <a:xfrm>
-            <a:off x="4297680" y="3749039"/>
+            <a:off x="4297680" y="3931920"/>
             <a:ext cx="7071055" cy="822960"/>
           </a:xfrm>
           <a:prstGeom prst="rect">
@@ -4016,7 +4253,7 @@
             <a:r>
               <a:rPr sz="1500" b="0" i="0">
                 <a:solidFill>
-                  <a:srgbClr val="2B2B2B"/>
+                  <a:srgbClr val="26231F"/>
                 </a:solidFill>
               </a:rPr>
               <a:t>한 줄로 내용을 적어 주세요</a:t>
@@ -4026,27 +4263,25 @@
       </p:sp>
       <p:sp>
         <p:nvSpPr>
-          <p:cNvPr id="17" name="줄 4"/>
+          <p:cNvPr id="21" name="줄 4"/>
           <p:cNvSpPr/>
           <p:nvPr/>
         </p:nvSpPr>
         <p:spPr>
           <a:xfrm>
-            <a:off x="640080" y="4754879"/>
+            <a:off x="640080" y="4937759"/>
             <a:ext cx="10911535" cy="914400"/>
           </a:xfrm>
           <a:prstGeom prst="roundRect">
             <a:avLst>
-              <a:gd name="adj" fmla="val 8000"/>
+              <a:gd name="adj" fmla="val 4000"/>
             </a:avLst>
           </a:prstGeom>
           <a:solidFill>
-            <a:srgbClr val="F9F0F6"/>
+            <a:srgbClr val="FBECF6"/>
           </a:solidFill>
-          <a:ln w="12700">
-            <a:solidFill>
-              <a:srgbClr val="F0D1E5"/>
-            </a:solidFill>
+          <a:ln>
+            <a:noFill/>
           </a:ln>
         </p:spPr>
         <p:txBody>
@@ -4059,20 +4294,49 @@
       </p:sp>
       <p:sp>
         <p:nvSpPr>
-          <p:cNvPr id="18" name="번호 4"/>
+          <p:cNvPr id="22" name="포인트 막대"/>
           <p:cNvSpPr/>
           <p:nvPr/>
         </p:nvSpPr>
         <p:spPr>
           <a:xfrm>
-            <a:off x="822959" y="4983479"/>
+            <a:off x="640080" y="5047488"/>
+            <a:ext cx="54864" cy="694944"/>
+          </a:xfrm>
+          <a:prstGeom prst="rect">
+            <a:avLst/>
+          </a:prstGeom>
+          <a:solidFill>
+            <a:srgbClr val="D879B8"/>
+          </a:solidFill>
+          <a:ln>
+            <a:noFill/>
+          </a:ln>
+        </p:spPr>
+        <p:txBody>
+          <a:bodyPr rtlCol="0" anchor="ctr"/>
+          <a:lstStyle/>
+          <a:p>
+            <a:pPr algn="ctr"/>
+          </a:p>
+        </p:txBody>
+      </p:sp>
+      <p:sp>
+        <p:nvSpPr>
+          <p:cNvPr id="23" name="번호 4"/>
+          <p:cNvSpPr/>
+          <p:nvPr/>
+        </p:nvSpPr>
+        <p:spPr>
+          <a:xfrm>
+            <a:off x="822959" y="5166359"/>
             <a:ext cx="457200" cy="457200"/>
           </a:xfrm>
           <a:prstGeom prst="ellipse">
             <a:avLst/>
           </a:prstGeom>
           <a:solidFill>
-            <a:srgbClr val="C15CA0"/>
+            <a:srgbClr val="D879B8"/>
           </a:solidFill>
           <a:ln>
             <a:noFill/>
@@ -4092,7 +4356,7 @@
             <a:r>
               <a:rPr sz="1600" b="1" i="0">
                 <a:solidFill>
-                  <a:srgbClr val="FFFFFF"/>
+                  <a:srgbClr val="26231F"/>
                 </a:solidFill>
               </a:rPr>
               <a:t>4</a:t>
@@ -4102,13 +4366,13 @@
       </p:sp>
       <p:sp>
         <p:nvSpPr>
-          <p:cNvPr id="19" name="TextBox 18"/>
+          <p:cNvPr id="24" name="TextBox 23"/>
           <p:cNvSpPr txBox="1"/>
           <p:nvPr/>
         </p:nvSpPr>
         <p:spPr>
           <a:xfrm>
-            <a:off x="1508760" y="4800599"/>
+            <a:off x="1508760" y="4983479"/>
             <a:ext cx="2743200" cy="822960"/>
           </a:xfrm>
           <a:prstGeom prst="rect">
@@ -4130,7 +4394,7 @@
             <a:r>
               <a:rPr sz="1800" b="1" i="0">
                 <a:solidFill>
-                  <a:srgbClr val="85326A"/>
+                  <a:srgbClr val="49273E"/>
                 </a:solidFill>
               </a:rPr>
               <a:t>진행 계획</a:t>
@@ -4140,13 +4404,13 @@
       </p:sp>
       <p:sp>
         <p:nvSpPr>
-          <p:cNvPr id="20" name="TextBox 19"/>
+          <p:cNvPr id="25" name="TextBox 24"/>
           <p:cNvSpPr txBox="1"/>
           <p:nvPr/>
         </p:nvSpPr>
         <p:spPr>
           <a:xfrm>
-            <a:off x="4297680" y="4800599"/>
+            <a:off x="4297680" y="4983479"/>
             <a:ext cx="7071055" cy="822960"/>
           </a:xfrm>
           <a:prstGeom prst="rect">
@@ -4168,7 +4432,7 @@
             <a:r>
               <a:rPr sz="1500" b="0" i="0">
                 <a:solidFill>
-                  <a:srgbClr val="2B2B2B"/>
+                  <a:srgbClr val="26231F"/>
                 </a:solidFill>
               </a:rPr>
               <a:t>한 줄로 내용을 적어 주세요</a:t>
@@ -4190,7 +4454,7 @@
     <p:bg>
       <p:bgPr>
         <a:solidFill>
-          <a:srgbClr val="F9F0F6"/>
+          <a:srgbClr val="FBECF6"/>
         </a:solidFill>
         <a:effectLst/>
       </p:bgPr>
@@ -4210,14 +4474,14 @@
         </p:nvSpPr>
         <p:spPr>
           <a:xfrm>
-            <a:off x="0" y="6035040"/>
-            <a:ext cx="1737360" cy="822960"/>
-          </a:xfrm>
-          <a:prstGeom prst="rtTriangle">
+            <a:off x="640080" y="566928"/>
+            <a:ext cx="10911535" cy="10972"/>
+          </a:xfrm>
+          <a:prstGeom prst="rect">
             <a:avLst/>
           </a:prstGeom>
           <a:solidFill>
-            <a:srgbClr val="F0D1E5"/>
+            <a:srgbClr val="26231F"/>
           </a:solidFill>
           <a:ln>
             <a:noFill/>
@@ -4233,20 +4497,58 @@
       </p:sp>
       <p:sp>
         <p:nvSpPr>
-          <p:cNvPr id="4" name="장식"/>
+          <p:cNvPr id="4" name="상단 라벨"/>
+          <p:cNvSpPr txBox="1"/>
+          <p:nvPr/>
+        </p:nvSpPr>
+        <p:spPr>
+          <a:xfrm>
+            <a:off x="640080" y="237744"/>
+            <a:ext cx="5486400" cy="274320"/>
+          </a:xfrm>
+          <a:prstGeom prst="rect">
+            <a:avLst/>
+          </a:prstGeom>
+          <a:noFill/>
+        </p:spPr>
+        <p:txBody>
+          <a:bodyPr wrap="square" lIns="54864" rIns="54864" tIns="27432" bIns="27432" anchor="ctr">
+            <a:noAutofit/>
+          </a:bodyPr>
+          <a:lstStyle/>
+          <a:p>
+            <a:pPr algn="l">
+              <a:lnSpc>
+                <a:spcPct val="115000"/>
+              </a:lnSpc>
+            </a:pPr>
+            <a:r>
+              <a:rPr sz="900" b="1" i="0" spc="250">
+                <a:solidFill>
+                  <a:srgbClr val="26231F"/>
+                </a:solidFill>
+              </a:rPr>
+              <a:t>PRESENTATION</a:t>
+            </a:r>
+          </a:p>
+        </p:txBody>
+      </p:sp>
+      <p:sp>
+        <p:nvSpPr>
+          <p:cNvPr id="5" name="포인트"/>
           <p:cNvSpPr/>
           <p:nvPr/>
         </p:nvSpPr>
         <p:spPr>
-          <a:xfrm>
-            <a:off x="0" y="6400800"/>
-            <a:ext cx="914400" cy="457200"/>
-          </a:xfrm>
-          <a:prstGeom prst="rtTriangle">
+          <a:xfrm rot="18900000">
+            <a:off x="11204143" y="246888"/>
+            <a:ext cx="237744" cy="237744"/>
+          </a:xfrm>
+          <a:prstGeom prst="teardrop">
             <a:avLst/>
           </a:prstGeom>
           <a:solidFill>
-            <a:srgbClr val="C15CA0"/>
+            <a:srgbClr val="D879B8"/>
           </a:solidFill>
           <a:ln>
             <a:noFill/>
@@ -4272,8 +4574,8 @@
         </p:nvSpPr>
         <p:spPr>
           <a:xfrm>
-            <a:off x="640080" y="457200"/>
-            <a:ext cx="9722815" cy="868680"/>
+            <a:off x="640080" y="731520"/>
+            <a:ext cx="10911535" cy="822960"/>
           </a:xfrm>
         </p:spPr>
         <p:txBody>
@@ -4290,7 +4592,7 @@
             <a:r>
               <a:rPr sz="3000" b="1" i="0">
                 <a:solidFill>
-                  <a:srgbClr val="85326A"/>
+                  <a:srgbClr val="26231F"/>
                 </a:solidFill>
               </a:rPr>
               <a:t>핵심 메시지</a:t>
@@ -4300,13 +4602,13 @@
       </p:sp>
       <p:sp>
         <p:nvSpPr>
-          <p:cNvPr id="5" name="핵심 문장"/>
+          <p:cNvPr id="6" name="핵심 문장"/>
           <p:cNvSpPr txBox="1"/>
           <p:nvPr/>
         </p:nvSpPr>
         <p:spPr>
           <a:xfrm>
-            <a:off x="640080" y="1600200"/>
+            <a:off x="640080" y="1783080"/>
             <a:ext cx="10911535" cy="1188720"/>
           </a:xfrm>
           <a:prstGeom prst="rect">
@@ -4328,7 +4630,7 @@
             <a:r>
               <a:rPr sz="2600" b="1" i="0">
                 <a:solidFill>
-                  <a:srgbClr val="85326A"/>
+                  <a:srgbClr val="49273E"/>
                 </a:solidFill>
               </a:rPr>
               <a:t>한 문장으로 말하면 — 여기에 핵심 메시지를 입력하세요</a:t>
@@ -4338,27 +4640,25 @@
       </p:sp>
       <p:sp>
         <p:nvSpPr>
-          <p:cNvPr id="6" name="카드 1"/>
+          <p:cNvPr id="7" name="카드 1"/>
           <p:cNvSpPr/>
           <p:nvPr/>
         </p:nvSpPr>
         <p:spPr>
           <a:xfrm>
-            <a:off x="640080" y="3063240"/>
+            <a:off x="640080" y="3246120"/>
             <a:ext cx="3484778" cy="3017520"/>
           </a:xfrm>
           <a:prstGeom prst="roundRect">
             <a:avLst>
-              <a:gd name="adj" fmla="val 8000"/>
+              <a:gd name="adj" fmla="val 4000"/>
             </a:avLst>
           </a:prstGeom>
           <a:solidFill>
-            <a:srgbClr val="F9F0F6"/>
+            <a:srgbClr val="FBECF6"/>
           </a:solidFill>
-          <a:ln w="15875">
-            <a:solidFill>
-              <a:srgbClr val="F0D1E5"/>
-            </a:solidFill>
+          <a:ln>
+            <a:noFill/>
           </a:ln>
         </p:spPr>
         <p:txBody>
@@ -4371,20 +4671,49 @@
       </p:sp>
       <p:sp>
         <p:nvSpPr>
-          <p:cNvPr id="7" name="번호 1"/>
+          <p:cNvPr id="8" name="포인트 막대"/>
           <p:cNvSpPr/>
           <p:nvPr/>
         </p:nvSpPr>
         <p:spPr>
           <a:xfrm>
-            <a:off x="822959" y="3246120"/>
+            <a:off x="640080" y="3355848"/>
+            <a:ext cx="54864" cy="2798063"/>
+          </a:xfrm>
+          <a:prstGeom prst="rect">
+            <a:avLst/>
+          </a:prstGeom>
+          <a:solidFill>
+            <a:srgbClr val="D879B8"/>
+          </a:solidFill>
+          <a:ln>
+            <a:noFill/>
+          </a:ln>
+        </p:spPr>
+        <p:txBody>
+          <a:bodyPr rtlCol="0" anchor="ctr"/>
+          <a:lstStyle/>
+          <a:p>
+            <a:pPr algn="ctr"/>
+          </a:p>
+        </p:txBody>
+      </p:sp>
+      <p:sp>
+        <p:nvSpPr>
+          <p:cNvPr id="9" name="번호 1"/>
+          <p:cNvSpPr/>
+          <p:nvPr/>
+        </p:nvSpPr>
+        <p:spPr>
+          <a:xfrm>
+            <a:off x="822959" y="3429000"/>
             <a:ext cx="457200" cy="457200"/>
           </a:xfrm>
           <a:prstGeom prst="ellipse">
             <a:avLst/>
           </a:prstGeom>
           <a:solidFill>
-            <a:srgbClr val="C15CA0"/>
+            <a:srgbClr val="D879B8"/>
           </a:solidFill>
           <a:ln>
             <a:noFill/>
@@ -4404,7 +4733,7 @@
             <a:r>
               <a:rPr sz="1600" b="1" i="0">
                 <a:solidFill>
-                  <a:srgbClr val="FFFFFF"/>
+                  <a:srgbClr val="26231F"/>
                 </a:solidFill>
               </a:rPr>
               <a:t>1</a:t>
@@ -4414,13 +4743,13 @@
       </p:sp>
       <p:sp>
         <p:nvSpPr>
-          <p:cNvPr id="8" name="TextBox 7"/>
+          <p:cNvPr id="10" name="TextBox 9"/>
           <p:cNvSpPr txBox="1"/>
           <p:nvPr/>
         </p:nvSpPr>
         <p:spPr>
           <a:xfrm>
-            <a:off x="777240" y="3840480"/>
+            <a:off x="777240" y="4023360"/>
             <a:ext cx="3210458" cy="640080"/>
           </a:xfrm>
           <a:prstGeom prst="rect">
@@ -4442,7 +4771,7 @@
             <a:r>
               <a:rPr sz="1800" b="1" i="0">
                 <a:solidFill>
-                  <a:srgbClr val="85326A"/>
+                  <a:srgbClr val="49273E"/>
                 </a:solidFill>
               </a:rPr>
               <a:t>현황</a:t>
@@ -4452,13 +4781,13 @@
       </p:sp>
       <p:sp>
         <p:nvSpPr>
-          <p:cNvPr id="9" name="TextBox 8"/>
+          <p:cNvPr id="11" name="TextBox 10"/>
           <p:cNvSpPr txBox="1"/>
           <p:nvPr/>
         </p:nvSpPr>
         <p:spPr>
           <a:xfrm>
-            <a:off x="777240" y="4526280"/>
+            <a:off x="777240" y="4709160"/>
             <a:ext cx="3210458" cy="1417319"/>
           </a:xfrm>
           <a:prstGeom prst="rect">
@@ -4480,7 +4809,7 @@
             <a:r>
               <a:rPr sz="1600" b="0" i="0">
                 <a:solidFill>
-                  <a:srgbClr val="2B2B2B"/>
+                  <a:srgbClr val="26231F"/>
                 </a:solidFill>
               </a:rPr>
               <a:t>내용을 입력하세요</a:t>
@@ -4495,7 +4824,7 @@
             <a:r>
               <a:rPr sz="1600" b="0" i="0">
                 <a:solidFill>
-                  <a:srgbClr val="2B2B2B"/>
+                  <a:srgbClr val="26231F"/>
                 </a:solidFill>
               </a:rPr>
               <a:t>내용을 입력하세요</a:t>
@@ -4505,27 +4834,25 @@
       </p:sp>
       <p:sp>
         <p:nvSpPr>
-          <p:cNvPr id="10" name="카드 2"/>
+          <p:cNvPr id="12" name="카드 2"/>
           <p:cNvSpPr/>
           <p:nvPr/>
         </p:nvSpPr>
         <p:spPr>
           <a:xfrm>
-            <a:off x="4353458" y="3063240"/>
+            <a:off x="4353458" y="3246120"/>
             <a:ext cx="3484778" cy="3017520"/>
           </a:xfrm>
           <a:prstGeom prst="roundRect">
             <a:avLst>
-              <a:gd name="adj" fmla="val 8000"/>
+              <a:gd name="adj" fmla="val 4000"/>
             </a:avLst>
           </a:prstGeom>
           <a:solidFill>
-            <a:srgbClr val="F9F0F6"/>
+            <a:srgbClr val="FBECF6"/>
           </a:solidFill>
-          <a:ln w="15875">
-            <a:solidFill>
-              <a:srgbClr val="F0D1E5"/>
-            </a:solidFill>
+          <a:ln>
+            <a:noFill/>
           </a:ln>
         </p:spPr>
         <p:txBody>
@@ -4538,20 +4865,49 @@
       </p:sp>
       <p:sp>
         <p:nvSpPr>
-          <p:cNvPr id="11" name="번호 2"/>
+          <p:cNvPr id="13" name="포인트 막대"/>
           <p:cNvSpPr/>
           <p:nvPr/>
         </p:nvSpPr>
         <p:spPr>
           <a:xfrm>
-            <a:off x="4536338" y="3246120"/>
+            <a:off x="4353458" y="3355848"/>
+            <a:ext cx="54864" cy="2798063"/>
+          </a:xfrm>
+          <a:prstGeom prst="rect">
+            <a:avLst/>
+          </a:prstGeom>
+          <a:solidFill>
+            <a:srgbClr val="D879B8"/>
+          </a:solidFill>
+          <a:ln>
+            <a:noFill/>
+          </a:ln>
+        </p:spPr>
+        <p:txBody>
+          <a:bodyPr rtlCol="0" anchor="ctr"/>
+          <a:lstStyle/>
+          <a:p>
+            <a:pPr algn="ctr"/>
+          </a:p>
+        </p:txBody>
+      </p:sp>
+      <p:sp>
+        <p:nvSpPr>
+          <p:cNvPr id="14" name="번호 2"/>
+          <p:cNvSpPr/>
+          <p:nvPr/>
+        </p:nvSpPr>
+        <p:spPr>
+          <a:xfrm>
+            <a:off x="4536338" y="3429000"/>
             <a:ext cx="457200" cy="457200"/>
           </a:xfrm>
           <a:prstGeom prst="ellipse">
             <a:avLst/>
           </a:prstGeom>
           <a:solidFill>
-            <a:srgbClr val="C15CA0"/>
+            <a:srgbClr val="D879B8"/>
           </a:solidFill>
           <a:ln>
             <a:noFill/>
@@ -4571,7 +4927,7 @@
             <a:r>
               <a:rPr sz="1600" b="1" i="0">
                 <a:solidFill>
-                  <a:srgbClr val="FFFFFF"/>
+                  <a:srgbClr val="26231F"/>
                 </a:solidFill>
               </a:rPr>
               <a:t>2</a:t>
@@ -4581,13 +4937,13 @@
       </p:sp>
       <p:sp>
         <p:nvSpPr>
-          <p:cNvPr id="12" name="TextBox 11"/>
+          <p:cNvPr id="15" name="TextBox 14"/>
           <p:cNvSpPr txBox="1"/>
           <p:nvPr/>
         </p:nvSpPr>
         <p:spPr>
           <a:xfrm>
-            <a:off x="4490618" y="3840480"/>
+            <a:off x="4490618" y="4023360"/>
             <a:ext cx="3210458" cy="640080"/>
           </a:xfrm>
           <a:prstGeom prst="rect">
@@ -4609,7 +4965,7 @@
             <a:r>
               <a:rPr sz="1800" b="1" i="0">
                 <a:solidFill>
-                  <a:srgbClr val="85326A"/>
+                  <a:srgbClr val="49273E"/>
                 </a:solidFill>
               </a:rPr>
               <a:t>제안</a:t>
@@ -4619,13 +4975,13 @@
       </p:sp>
       <p:sp>
         <p:nvSpPr>
-          <p:cNvPr id="13" name="TextBox 12"/>
+          <p:cNvPr id="16" name="TextBox 15"/>
           <p:cNvSpPr txBox="1"/>
           <p:nvPr/>
         </p:nvSpPr>
         <p:spPr>
           <a:xfrm>
-            <a:off x="4490618" y="4526280"/>
+            <a:off x="4490618" y="4709160"/>
             <a:ext cx="3210458" cy="1417319"/>
           </a:xfrm>
           <a:prstGeom prst="rect">
@@ -4647,7 +5003,7 @@
             <a:r>
               <a:rPr sz="1600" b="0" i="0">
                 <a:solidFill>
-                  <a:srgbClr val="2B2B2B"/>
+                  <a:srgbClr val="26231F"/>
                 </a:solidFill>
               </a:rPr>
               <a:t>내용을 입력하세요</a:t>
@@ -4662,7 +5018,7 @@
             <a:r>
               <a:rPr sz="1600" b="0" i="0">
                 <a:solidFill>
-                  <a:srgbClr val="2B2B2B"/>
+                  <a:srgbClr val="26231F"/>
                 </a:solidFill>
               </a:rPr>
               <a:t>내용을 입력하세요</a:t>
@@ -4672,27 +5028,25 @@
       </p:sp>
       <p:sp>
         <p:nvSpPr>
-          <p:cNvPr id="14" name="카드 3"/>
+          <p:cNvPr id="17" name="카드 3"/>
           <p:cNvSpPr/>
           <p:nvPr/>
         </p:nvSpPr>
         <p:spPr>
           <a:xfrm>
-            <a:off x="8066836" y="3063240"/>
+            <a:off x="8066836" y="3246120"/>
             <a:ext cx="3484778" cy="3017520"/>
           </a:xfrm>
           <a:prstGeom prst="roundRect">
             <a:avLst>
-              <a:gd name="adj" fmla="val 8000"/>
+              <a:gd name="adj" fmla="val 4000"/>
             </a:avLst>
           </a:prstGeom>
           <a:solidFill>
-            <a:srgbClr val="F9F0F6"/>
+            <a:srgbClr val="FBECF6"/>
           </a:solidFill>
-          <a:ln w="15875">
-            <a:solidFill>
-              <a:srgbClr val="F0D1E5"/>
-            </a:solidFill>
+          <a:ln>
+            <a:noFill/>
           </a:ln>
         </p:spPr>
         <p:txBody>
@@ -4705,20 +5059,49 @@
       </p:sp>
       <p:sp>
         <p:nvSpPr>
-          <p:cNvPr id="15" name="번호 3"/>
+          <p:cNvPr id="18" name="포인트 막대"/>
           <p:cNvSpPr/>
           <p:nvPr/>
         </p:nvSpPr>
         <p:spPr>
           <a:xfrm>
-            <a:off x="8249716" y="3246120"/>
+            <a:off x="8066836" y="3355848"/>
+            <a:ext cx="54864" cy="2798063"/>
+          </a:xfrm>
+          <a:prstGeom prst="rect">
+            <a:avLst/>
+          </a:prstGeom>
+          <a:solidFill>
+            <a:srgbClr val="D879B8"/>
+          </a:solidFill>
+          <a:ln>
+            <a:noFill/>
+          </a:ln>
+        </p:spPr>
+        <p:txBody>
+          <a:bodyPr rtlCol="0" anchor="ctr"/>
+          <a:lstStyle/>
+          <a:p>
+            <a:pPr algn="ctr"/>
+          </a:p>
+        </p:txBody>
+      </p:sp>
+      <p:sp>
+        <p:nvSpPr>
+          <p:cNvPr id="19" name="번호 3"/>
+          <p:cNvSpPr/>
+          <p:nvPr/>
+        </p:nvSpPr>
+        <p:spPr>
+          <a:xfrm>
+            <a:off x="8249716" y="3429000"/>
             <a:ext cx="457200" cy="457200"/>
           </a:xfrm>
           <a:prstGeom prst="ellipse">
             <a:avLst/>
           </a:prstGeom>
           <a:solidFill>
-            <a:srgbClr val="C15CA0"/>
+            <a:srgbClr val="D879B8"/>
           </a:solidFill>
           <a:ln>
             <a:noFill/>
@@ -4738,7 +5121,7 @@
             <a:r>
               <a:rPr sz="1600" b="1" i="0">
                 <a:solidFill>
-                  <a:srgbClr val="FFFFFF"/>
+                  <a:srgbClr val="26231F"/>
                 </a:solidFill>
               </a:rPr>
               <a:t>3</a:t>
@@ -4748,13 +5131,13 @@
       </p:sp>
       <p:sp>
         <p:nvSpPr>
-          <p:cNvPr id="16" name="TextBox 15"/>
+          <p:cNvPr id="20" name="TextBox 19"/>
           <p:cNvSpPr txBox="1"/>
           <p:nvPr/>
         </p:nvSpPr>
         <p:spPr>
           <a:xfrm>
-            <a:off x="8203996" y="3840480"/>
+            <a:off x="8203996" y="4023360"/>
             <a:ext cx="3210458" cy="640080"/>
           </a:xfrm>
           <a:prstGeom prst="rect">
@@ -4776,7 +5159,7 @@
             <a:r>
               <a:rPr sz="1800" b="1" i="0">
                 <a:solidFill>
-                  <a:srgbClr val="85326A"/>
+                  <a:srgbClr val="49273E"/>
                 </a:solidFill>
               </a:rPr>
               <a:t>효과</a:t>
@@ -4786,13 +5169,13 @@
       </p:sp>
       <p:sp>
         <p:nvSpPr>
-          <p:cNvPr id="17" name="TextBox 16"/>
+          <p:cNvPr id="21" name="TextBox 20"/>
           <p:cNvSpPr txBox="1"/>
           <p:nvPr/>
         </p:nvSpPr>
         <p:spPr>
           <a:xfrm>
-            <a:off x="8203996" y="4526280"/>
+            <a:off x="8203996" y="4709160"/>
             <a:ext cx="3210458" cy="1417319"/>
           </a:xfrm>
           <a:prstGeom prst="rect">
@@ -4814,7 +5197,7 @@
             <a:r>
               <a:rPr sz="1600" b="0" i="0">
                 <a:solidFill>
-                  <a:srgbClr val="2B2B2B"/>
+                  <a:srgbClr val="26231F"/>
                 </a:solidFill>
               </a:rPr>
               <a:t>내용을 입력하세요</a:t>
@@ -4829,7 +5212,7 @@
             <a:r>
               <a:rPr sz="1600" b="0" i="0">
                 <a:solidFill>
-                  <a:srgbClr val="2B2B2B"/>
+                  <a:srgbClr val="26231F"/>
                 </a:solidFill>
               </a:rPr>
               <a:t>내용을 입력하세요</a:t>
@@ -4851,7 +5234,7 @@
     <p:bg>
       <p:bgPr>
         <a:solidFill>
-          <a:srgbClr val="F9F0F6"/>
+          <a:srgbClr val="FBECF6"/>
         </a:solidFill>
         <a:effectLst/>
       </p:bgPr>
@@ -4871,14 +5254,14 @@
         </p:nvSpPr>
         <p:spPr>
           <a:xfrm>
-            <a:off x="0" y="6035040"/>
-            <a:ext cx="1737360" cy="822960"/>
-          </a:xfrm>
-          <a:prstGeom prst="rtTriangle">
+            <a:off x="640080" y="566928"/>
+            <a:ext cx="10911535" cy="10972"/>
+          </a:xfrm>
+          <a:prstGeom prst="rect">
             <a:avLst/>
           </a:prstGeom>
           <a:solidFill>
-            <a:srgbClr val="F0D1E5"/>
+            <a:srgbClr val="26231F"/>
           </a:solidFill>
           <a:ln>
             <a:noFill/>
@@ -4894,20 +5277,58 @@
       </p:sp>
       <p:sp>
         <p:nvSpPr>
-          <p:cNvPr id="4" name="장식"/>
+          <p:cNvPr id="4" name="상단 라벨"/>
+          <p:cNvSpPr txBox="1"/>
+          <p:nvPr/>
+        </p:nvSpPr>
+        <p:spPr>
+          <a:xfrm>
+            <a:off x="640080" y="237744"/>
+            <a:ext cx="5486400" cy="274320"/>
+          </a:xfrm>
+          <a:prstGeom prst="rect">
+            <a:avLst/>
+          </a:prstGeom>
+          <a:noFill/>
+        </p:spPr>
+        <p:txBody>
+          <a:bodyPr wrap="square" lIns="54864" rIns="54864" tIns="27432" bIns="27432" anchor="ctr">
+            <a:noAutofit/>
+          </a:bodyPr>
+          <a:lstStyle/>
+          <a:p>
+            <a:pPr algn="l">
+              <a:lnSpc>
+                <a:spcPct val="115000"/>
+              </a:lnSpc>
+            </a:pPr>
+            <a:r>
+              <a:rPr sz="900" b="1" i="0" spc="250">
+                <a:solidFill>
+                  <a:srgbClr val="26231F"/>
+                </a:solidFill>
+              </a:rPr>
+              <a:t>PRESENTATION</a:t>
+            </a:r>
+          </a:p>
+        </p:txBody>
+      </p:sp>
+      <p:sp>
+        <p:nvSpPr>
+          <p:cNvPr id="5" name="포인트"/>
           <p:cNvSpPr/>
           <p:nvPr/>
         </p:nvSpPr>
         <p:spPr>
-          <a:xfrm>
-            <a:off x="0" y="6400800"/>
-            <a:ext cx="914400" cy="457200"/>
-          </a:xfrm>
-          <a:prstGeom prst="rtTriangle">
+          <a:xfrm rot="18900000">
+            <a:off x="11204143" y="246888"/>
+            <a:ext cx="237744" cy="237744"/>
+          </a:xfrm>
+          <a:prstGeom prst="teardrop">
             <a:avLst/>
           </a:prstGeom>
           <a:solidFill>
-            <a:srgbClr val="C15CA0"/>
+            <a:srgbClr val="D879B8"/>
           </a:solidFill>
           <a:ln>
             <a:noFill/>
@@ -4933,8 +5354,8 @@
         </p:nvSpPr>
         <p:spPr>
           <a:xfrm>
-            <a:off x="640080" y="457200"/>
-            <a:ext cx="9722815" cy="868680"/>
+            <a:off x="640080" y="731520"/>
+            <a:ext cx="10911535" cy="822960"/>
           </a:xfrm>
         </p:spPr>
         <p:txBody>
@@ -4951,7 +5372,7 @@
             <a:r>
               <a:rPr sz="3000" b="1" i="0">
                 <a:solidFill>
-                  <a:srgbClr val="85326A"/>
+                  <a:srgbClr val="26231F"/>
                 </a:solidFill>
               </a:rPr>
               <a:t>한눈에 비교</a:t>
@@ -4961,27 +5382,25 @@
       </p:sp>
       <p:sp>
         <p:nvSpPr>
-          <p:cNvPr id="5" name="왼쪽 칸"/>
+          <p:cNvPr id="6" name="왼쪽 칸"/>
           <p:cNvSpPr/>
           <p:nvPr/>
         </p:nvSpPr>
         <p:spPr>
           <a:xfrm>
-            <a:off x="640080" y="1600200"/>
-            <a:ext cx="5272887" cy="4800600"/>
+            <a:off x="640080" y="1783080"/>
+            <a:ext cx="5272887" cy="3291840"/>
           </a:xfrm>
           <a:prstGeom prst="roundRect">
             <a:avLst>
-              <a:gd name="adj" fmla="val 8000"/>
+              <a:gd name="adj" fmla="val 4000"/>
             </a:avLst>
           </a:prstGeom>
           <a:solidFill>
-            <a:srgbClr val="F9F0F6"/>
+            <a:srgbClr val="FBECF6"/>
           </a:solidFill>
-          <a:ln w="12700">
-            <a:solidFill>
-              <a:srgbClr val="F0D1E5"/>
-            </a:solidFill>
+          <a:ln>
+            <a:noFill/>
           </a:ln>
         </p:spPr>
         <p:txBody>
@@ -4994,13 +5413,42 @@
       </p:sp>
       <p:sp>
         <p:nvSpPr>
-          <p:cNvPr id="6" name="칸 제목 바"/>
+          <p:cNvPr id="7" name="포인트 막대"/>
           <p:cNvSpPr/>
           <p:nvPr/>
         </p:nvSpPr>
         <p:spPr>
           <a:xfrm>
-            <a:off x="640080" y="1600200"/>
+            <a:off x="640080" y="1892807"/>
+            <a:ext cx="54864" cy="3072384"/>
+          </a:xfrm>
+          <a:prstGeom prst="rect">
+            <a:avLst/>
+          </a:prstGeom>
+          <a:solidFill>
+            <a:srgbClr val="D879B8"/>
+          </a:solidFill>
+          <a:ln>
+            <a:noFill/>
+          </a:ln>
+        </p:spPr>
+        <p:txBody>
+          <a:bodyPr rtlCol="0" anchor="ctr"/>
+          <a:lstStyle/>
+          <a:p>
+            <a:pPr algn="ctr"/>
+          </a:p>
+        </p:txBody>
+      </p:sp>
+      <p:sp>
+        <p:nvSpPr>
+          <p:cNvPr id="8" name="칸 제목 바"/>
+          <p:cNvSpPr/>
+          <p:nvPr/>
+        </p:nvSpPr>
+        <p:spPr>
+          <a:xfrm>
+            <a:off x="640080" y="1783080"/>
             <a:ext cx="5272887" cy="640080"/>
           </a:xfrm>
           <a:prstGeom prst="roundRect">
@@ -5009,7 +5457,7 @@
             </a:avLst>
           </a:prstGeom>
           <a:solidFill>
-            <a:srgbClr val="C15CA0"/>
+            <a:srgbClr val="D879B8"/>
           </a:solidFill>
           <a:ln>
             <a:noFill/>
@@ -5025,13 +5473,13 @@
       </p:sp>
       <p:sp>
         <p:nvSpPr>
-          <p:cNvPr id="7" name="TextBox 6"/>
+          <p:cNvPr id="9" name="TextBox 8"/>
           <p:cNvSpPr txBox="1"/>
           <p:nvPr/>
         </p:nvSpPr>
         <p:spPr>
           <a:xfrm>
-            <a:off x="822959" y="1600200"/>
+            <a:off x="822959" y="1783080"/>
             <a:ext cx="4907127" cy="640080"/>
           </a:xfrm>
           <a:prstGeom prst="rect">
@@ -5053,7 +5501,7 @@
             <a:r>
               <a:rPr sz="1800" b="1" i="0">
                 <a:solidFill>
-                  <a:srgbClr val="FFFFFF"/>
+                  <a:srgbClr val="26231F"/>
                 </a:solidFill>
               </a:rPr>
               <a:t>현재</a:t>
@@ -5063,14 +5511,14 @@
       </p:sp>
       <p:sp>
         <p:nvSpPr>
-          <p:cNvPr id="8" name="TextBox 7"/>
+          <p:cNvPr id="10" name="TextBox 9"/>
           <p:cNvSpPr txBox="1"/>
           <p:nvPr/>
         </p:nvSpPr>
         <p:spPr>
           <a:xfrm>
-            <a:off x="868680" y="2423160"/>
-            <a:ext cx="4815687" cy="3886200"/>
+            <a:off x="868680" y="2606040"/>
+            <a:ext cx="4815687" cy="2377440"/>
           </a:xfrm>
           <a:prstGeom prst="rect">
             <a:avLst/>
@@ -5096,7 +5544,7 @@
             <a:r>
               <a:rPr sz="1500" b="0" i="0">
                 <a:solidFill>
-                  <a:srgbClr val="2B2B2B"/>
+                  <a:srgbClr val="26231F"/>
                 </a:solidFill>
               </a:rPr>
               <a:t>내용을 입력하세요</a:t>
@@ -5116,7 +5564,7 @@
             <a:r>
               <a:rPr sz="1500" b="0" i="0">
                 <a:solidFill>
-                  <a:srgbClr val="2B2B2B"/>
+                  <a:srgbClr val="26231F"/>
                 </a:solidFill>
               </a:rPr>
               <a:t>내용을 입력하세요</a:t>
@@ -5136,7 +5584,7 @@
             <a:r>
               <a:rPr sz="1500" b="0" i="0">
                 <a:solidFill>
-                  <a:srgbClr val="2B2B2B"/>
+                  <a:srgbClr val="26231F"/>
                 </a:solidFill>
               </a:rPr>
               <a:t>내용을 입력하세요</a:t>
@@ -5146,27 +5594,25 @@
       </p:sp>
       <p:sp>
         <p:nvSpPr>
-          <p:cNvPr id="9" name="오른쪽 칸"/>
+          <p:cNvPr id="11" name="오른쪽 칸"/>
           <p:cNvSpPr/>
           <p:nvPr/>
         </p:nvSpPr>
         <p:spPr>
           <a:xfrm>
-            <a:off x="6278727" y="1600200"/>
-            <a:ext cx="5272887" cy="4800600"/>
+            <a:off x="6278727" y="1783080"/>
+            <a:ext cx="5272887" cy="3291840"/>
           </a:xfrm>
           <a:prstGeom prst="roundRect">
             <a:avLst>
-              <a:gd name="adj" fmla="val 8000"/>
+              <a:gd name="adj" fmla="val 4000"/>
             </a:avLst>
           </a:prstGeom>
           <a:solidFill>
-            <a:srgbClr val="F0D1E5"/>
+            <a:srgbClr val="F6D5EB"/>
           </a:solidFill>
-          <a:ln w="12700">
-            <a:solidFill>
-              <a:srgbClr val="F0D1E5"/>
-            </a:solidFill>
+          <a:ln>
+            <a:noFill/>
           </a:ln>
         </p:spPr>
         <p:txBody>
@@ -5179,13 +5625,42 @@
       </p:sp>
       <p:sp>
         <p:nvSpPr>
-          <p:cNvPr id="10" name="칸 제목 바"/>
+          <p:cNvPr id="12" name="포인트 막대"/>
           <p:cNvSpPr/>
           <p:nvPr/>
         </p:nvSpPr>
         <p:spPr>
           <a:xfrm>
-            <a:off x="6278727" y="1600200"/>
+            <a:off x="6278727" y="1892807"/>
+            <a:ext cx="54864" cy="3072384"/>
+          </a:xfrm>
+          <a:prstGeom prst="rect">
+            <a:avLst/>
+          </a:prstGeom>
+          <a:solidFill>
+            <a:srgbClr val="D879B8"/>
+          </a:solidFill>
+          <a:ln>
+            <a:noFill/>
+          </a:ln>
+        </p:spPr>
+        <p:txBody>
+          <a:bodyPr rtlCol="0" anchor="ctr"/>
+          <a:lstStyle/>
+          <a:p>
+            <a:pPr algn="ctr"/>
+          </a:p>
+        </p:txBody>
+      </p:sp>
+      <p:sp>
+        <p:nvSpPr>
+          <p:cNvPr id="13" name="칸 제목 바"/>
+          <p:cNvSpPr/>
+          <p:nvPr/>
+        </p:nvSpPr>
+        <p:spPr>
+          <a:xfrm>
+            <a:off x="6278727" y="1783080"/>
             <a:ext cx="5272887" cy="640080"/>
           </a:xfrm>
           <a:prstGeom prst="roundRect">
@@ -5194,7 +5669,7 @@
             </a:avLst>
           </a:prstGeom>
           <a:solidFill>
-            <a:srgbClr val="85326A"/>
+            <a:srgbClr val="49273E"/>
           </a:solidFill>
           <a:ln>
             <a:noFill/>
@@ -5210,13 +5685,13 @@
       </p:sp>
       <p:sp>
         <p:nvSpPr>
-          <p:cNvPr id="11" name="TextBox 10"/>
+          <p:cNvPr id="14" name="TextBox 13"/>
           <p:cNvSpPr txBox="1"/>
           <p:nvPr/>
         </p:nvSpPr>
         <p:spPr>
           <a:xfrm>
-            <a:off x="6461607" y="1600200"/>
+            <a:off x="6461607" y="1783080"/>
             <a:ext cx="4907127" cy="640080"/>
           </a:xfrm>
           <a:prstGeom prst="rect">
@@ -5248,14 +5723,14 @@
       </p:sp>
       <p:sp>
         <p:nvSpPr>
-          <p:cNvPr id="12" name="TextBox 11"/>
+          <p:cNvPr id="15" name="TextBox 14"/>
           <p:cNvSpPr txBox="1"/>
           <p:nvPr/>
         </p:nvSpPr>
         <p:spPr>
           <a:xfrm>
-            <a:off x="6507327" y="2423160"/>
-            <a:ext cx="4815687" cy="3886200"/>
+            <a:off x="6507327" y="2606040"/>
+            <a:ext cx="4815687" cy="2377440"/>
           </a:xfrm>
           <a:prstGeom prst="rect">
             <a:avLst/>
@@ -5281,7 +5756,7 @@
             <a:r>
               <a:rPr sz="1500" b="0" i="0">
                 <a:solidFill>
-                  <a:srgbClr val="2B2B2B"/>
+                  <a:srgbClr val="26231F"/>
                 </a:solidFill>
               </a:rPr>
               <a:t>내용을 입력하세요</a:t>
@@ -5301,7 +5776,7 @@
             <a:r>
               <a:rPr sz="1500" b="0" i="0">
                 <a:solidFill>
-                  <a:srgbClr val="2B2B2B"/>
+                  <a:srgbClr val="26231F"/>
                 </a:solidFill>
               </a:rPr>
               <a:t>내용을 입력하세요</a:t>
@@ -5321,7 +5796,7 @@
             <a:r>
               <a:rPr sz="1500" b="0" i="0">
                 <a:solidFill>
-                  <a:srgbClr val="2B2B2B"/>
+                  <a:srgbClr val="26231F"/>
                 </a:solidFill>
               </a:rPr>
               <a:t>내용을 입력하세요</a:t>
@@ -5343,7 +5818,7 @@
     <p:bg>
       <p:bgPr>
         <a:solidFill>
-          <a:srgbClr val="F9F0F6"/>
+          <a:srgbClr val="FBECF6"/>
         </a:solidFill>
         <a:effectLst/>
       </p:bgPr>
@@ -5363,14 +5838,14 @@
         </p:nvSpPr>
         <p:spPr>
           <a:xfrm>
-            <a:off x="0" y="6035040"/>
-            <a:ext cx="1737360" cy="822960"/>
-          </a:xfrm>
-          <a:prstGeom prst="rtTriangle">
+            <a:off x="640080" y="566928"/>
+            <a:ext cx="10911535" cy="10972"/>
+          </a:xfrm>
+          <a:prstGeom prst="rect">
             <a:avLst/>
           </a:prstGeom>
           <a:solidFill>
-            <a:srgbClr val="F0D1E5"/>
+            <a:srgbClr val="26231F"/>
           </a:solidFill>
           <a:ln>
             <a:noFill/>
@@ -5386,20 +5861,58 @@
       </p:sp>
       <p:sp>
         <p:nvSpPr>
-          <p:cNvPr id="4" name="장식"/>
+          <p:cNvPr id="4" name="상단 라벨"/>
+          <p:cNvSpPr txBox="1"/>
+          <p:nvPr/>
+        </p:nvSpPr>
+        <p:spPr>
+          <a:xfrm>
+            <a:off x="640080" y="237744"/>
+            <a:ext cx="5486400" cy="274320"/>
+          </a:xfrm>
+          <a:prstGeom prst="rect">
+            <a:avLst/>
+          </a:prstGeom>
+          <a:noFill/>
+        </p:spPr>
+        <p:txBody>
+          <a:bodyPr wrap="square" lIns="54864" rIns="54864" tIns="27432" bIns="27432" anchor="ctr">
+            <a:noAutofit/>
+          </a:bodyPr>
+          <a:lstStyle/>
+          <a:p>
+            <a:pPr algn="l">
+              <a:lnSpc>
+                <a:spcPct val="115000"/>
+              </a:lnSpc>
+            </a:pPr>
+            <a:r>
+              <a:rPr sz="900" b="1" i="0" spc="250">
+                <a:solidFill>
+                  <a:srgbClr val="26231F"/>
+                </a:solidFill>
+              </a:rPr>
+              <a:t>PRESENTATION</a:t>
+            </a:r>
+          </a:p>
+        </p:txBody>
+      </p:sp>
+      <p:sp>
+        <p:nvSpPr>
+          <p:cNvPr id="5" name="포인트"/>
           <p:cNvSpPr/>
           <p:nvPr/>
         </p:nvSpPr>
         <p:spPr>
-          <a:xfrm>
-            <a:off x="0" y="6400800"/>
-            <a:ext cx="914400" cy="457200"/>
-          </a:xfrm>
-          <a:prstGeom prst="rtTriangle">
+          <a:xfrm rot="18900000">
+            <a:off x="11204143" y="246888"/>
+            <a:ext cx="237744" cy="237744"/>
+          </a:xfrm>
+          <a:prstGeom prst="teardrop">
             <a:avLst/>
           </a:prstGeom>
           <a:solidFill>
-            <a:srgbClr val="C15CA0"/>
+            <a:srgbClr val="D879B8"/>
           </a:solidFill>
           <a:ln>
             <a:noFill/>
@@ -5425,8 +5938,8 @@
         </p:nvSpPr>
         <p:spPr>
           <a:xfrm>
-            <a:off x="640080" y="457200"/>
-            <a:ext cx="9722815" cy="868680"/>
+            <a:off x="640080" y="731520"/>
+            <a:ext cx="10911535" cy="822960"/>
           </a:xfrm>
         </p:spPr>
         <p:txBody>
@@ -5443,7 +5956,7 @@
             <a:r>
               <a:rPr sz="3000" b="1" i="0">
                 <a:solidFill>
-                  <a:srgbClr val="85326A"/>
+                  <a:srgbClr val="26231F"/>
                 </a:solidFill>
               </a:rPr>
               <a:t>일정·현황</a:t>
@@ -5453,14 +5966,14 @@
       </p:sp>
       <p:graphicFrame>
         <p:nvGraphicFramePr>
-          <p:cNvPr id="5" name="표"/>
+          <p:cNvPr id="6" name="표"/>
           <p:cNvGraphicFramePr>
             <a:graphicFrameLocks noGrp="1"/>
           </p:cNvGraphicFramePr>
           <p:nvPr/>
         </p:nvGraphicFramePr>
         <p:xfrm>
-          <a:off x="640080" y="1600200"/>
+          <a:off x="640080" y="1783080"/>
           <a:ext cx="10911532" cy="3840480"/>
         </p:xfrm>
         <a:graphic>
@@ -5485,7 +5998,7 @@
                       <a:r>
                         <a:rPr sz="1500" b="1">
                           <a:solidFill>
-                            <a:srgbClr val="FFFFFF"/>
+                            <a:srgbClr val="26231F"/>
                           </a:solidFill>
                         </a:rPr>
                         <a:t>단계</a:t>
@@ -5495,30 +6008,30 @@
                   <a:tcPr anchor="ctr" marL="73152" marR="73152">
                     <a:lnL w="9525" cap="flat" cmpd="sng" algn="ctr">
                       <a:solidFill>
-                        <a:srgbClr val="C15CA0"/>
+                        <a:srgbClr val="D879B8"/>
                       </a:solidFill>
                       <a:prstDash val="solid"/>
                     </a:lnL>
                     <a:lnR w="9525" cap="flat" cmpd="sng" algn="ctr">
                       <a:solidFill>
-                        <a:srgbClr val="C15CA0"/>
+                        <a:srgbClr val="D879B8"/>
                       </a:solidFill>
                       <a:prstDash val="solid"/>
                     </a:lnR>
                     <a:lnT w="9525" cap="flat" cmpd="sng" algn="ctr">
                       <a:solidFill>
-                        <a:srgbClr val="C15CA0"/>
+                        <a:srgbClr val="D879B8"/>
                       </a:solidFill>
                       <a:prstDash val="solid"/>
                     </a:lnT>
                     <a:lnB w="9525" cap="flat" cmpd="sng" algn="ctr">
                       <a:solidFill>
-                        <a:srgbClr val="C15CA0"/>
+                        <a:srgbClr val="D879B8"/>
                       </a:solidFill>
                       <a:prstDash val="solid"/>
                     </a:lnB>
                     <a:solidFill>
-                      <a:srgbClr val="C15CA0"/>
+                      <a:srgbClr val="D879B8"/>
                     </a:solidFill>
                   </a:tcPr>
                 </a:tc>
@@ -5531,7 +6044,7 @@
                       <a:r>
                         <a:rPr sz="1500" b="1">
                           <a:solidFill>
-                            <a:srgbClr val="FFFFFF"/>
+                            <a:srgbClr val="26231F"/>
                           </a:solidFill>
                         </a:rPr>
                         <a:t>내용</a:t>
@@ -5541,30 +6054,30 @@
                   <a:tcPr anchor="ctr" marL="73152" marR="73152">
                     <a:lnL w="9525" cap="flat" cmpd="sng" algn="ctr">
                       <a:solidFill>
-                        <a:srgbClr val="C15CA0"/>
+                        <a:srgbClr val="D879B8"/>
                       </a:solidFill>
                       <a:prstDash val="solid"/>
                     </a:lnL>
                     <a:lnR w="9525" cap="flat" cmpd="sng" algn="ctr">
                       <a:solidFill>
-                        <a:srgbClr val="C15CA0"/>
+                        <a:srgbClr val="D879B8"/>
                       </a:solidFill>
                       <a:prstDash val="solid"/>
                     </a:lnR>
                     <a:lnT w="9525" cap="flat" cmpd="sng" algn="ctr">
                       <a:solidFill>
-                        <a:srgbClr val="C15CA0"/>
+                        <a:srgbClr val="D879B8"/>
                       </a:solidFill>
                       <a:prstDash val="solid"/>
                     </a:lnT>
                     <a:lnB w="9525" cap="flat" cmpd="sng" algn="ctr">
                       <a:solidFill>
-                        <a:srgbClr val="C15CA0"/>
+                        <a:srgbClr val="D879B8"/>
                       </a:solidFill>
                       <a:prstDash val="solid"/>
                     </a:lnB>
                     <a:solidFill>
-                      <a:srgbClr val="C15CA0"/>
+                      <a:srgbClr val="D879B8"/>
                     </a:solidFill>
                   </a:tcPr>
                 </a:tc>
@@ -5577,7 +6090,7 @@
                       <a:r>
                         <a:rPr sz="1500" b="1">
                           <a:solidFill>
-                            <a:srgbClr val="FFFFFF"/>
+                            <a:srgbClr val="26231F"/>
                           </a:solidFill>
                         </a:rPr>
                         <a:t>기간</a:t>
@@ -5587,30 +6100,30 @@
                   <a:tcPr anchor="ctr" marL="73152" marR="73152">
                     <a:lnL w="9525" cap="flat" cmpd="sng" algn="ctr">
                       <a:solidFill>
-                        <a:srgbClr val="C15CA0"/>
+                        <a:srgbClr val="D879B8"/>
                       </a:solidFill>
                       <a:prstDash val="solid"/>
                     </a:lnL>
                     <a:lnR w="9525" cap="flat" cmpd="sng" algn="ctr">
                       <a:solidFill>
-                        <a:srgbClr val="C15CA0"/>
+                        <a:srgbClr val="D879B8"/>
                       </a:solidFill>
                       <a:prstDash val="solid"/>
                     </a:lnR>
                     <a:lnT w="9525" cap="flat" cmpd="sng" algn="ctr">
                       <a:solidFill>
-                        <a:srgbClr val="C15CA0"/>
+                        <a:srgbClr val="D879B8"/>
                       </a:solidFill>
                       <a:prstDash val="solid"/>
                     </a:lnT>
                     <a:lnB w="9525" cap="flat" cmpd="sng" algn="ctr">
                       <a:solidFill>
-                        <a:srgbClr val="C15CA0"/>
+                        <a:srgbClr val="D879B8"/>
                       </a:solidFill>
                       <a:prstDash val="solid"/>
                     </a:lnB>
                     <a:solidFill>
-                      <a:srgbClr val="C15CA0"/>
+                      <a:srgbClr val="D879B8"/>
                     </a:solidFill>
                   </a:tcPr>
                 </a:tc>
@@ -5623,7 +6136,7 @@
                       <a:r>
                         <a:rPr sz="1500" b="1">
                           <a:solidFill>
-                            <a:srgbClr val="FFFFFF"/>
+                            <a:srgbClr val="26231F"/>
                           </a:solidFill>
                         </a:rPr>
                         <a:t>담당</a:t>
@@ -5633,30 +6146,30 @@
                   <a:tcPr anchor="ctr" marL="73152" marR="73152">
                     <a:lnL w="9525" cap="flat" cmpd="sng" algn="ctr">
                       <a:solidFill>
-                        <a:srgbClr val="C15CA0"/>
+                        <a:srgbClr val="D879B8"/>
                       </a:solidFill>
                       <a:prstDash val="solid"/>
                     </a:lnL>
                     <a:lnR w="9525" cap="flat" cmpd="sng" algn="ctr">
                       <a:solidFill>
-                        <a:srgbClr val="C15CA0"/>
+                        <a:srgbClr val="D879B8"/>
                       </a:solidFill>
                       <a:prstDash val="solid"/>
                     </a:lnR>
                     <a:lnT w="9525" cap="flat" cmpd="sng" algn="ctr">
                       <a:solidFill>
-                        <a:srgbClr val="C15CA0"/>
+                        <a:srgbClr val="D879B8"/>
                       </a:solidFill>
                       <a:prstDash val="solid"/>
                     </a:lnT>
                     <a:lnB w="9525" cap="flat" cmpd="sng" algn="ctr">
                       <a:solidFill>
-                        <a:srgbClr val="C15CA0"/>
+                        <a:srgbClr val="D879B8"/>
                       </a:solidFill>
                       <a:prstDash val="solid"/>
                     </a:lnB>
                     <a:solidFill>
-                      <a:srgbClr val="C15CA0"/>
+                      <a:srgbClr val="D879B8"/>
                     </a:solidFill>
                   </a:tcPr>
                 </a:tc>
@@ -5671,7 +6184,7 @@
                       <a:r>
                         <a:rPr sz="1500" b="1">
                           <a:solidFill>
-                            <a:srgbClr val="85326A"/>
+                            <a:srgbClr val="49273E"/>
                           </a:solidFill>
                         </a:rPr>
                         <a:t>1</a:t>
@@ -5681,30 +6194,30 @@
                   <a:tcPr anchor="ctr" marL="73152" marR="73152">
                     <a:lnL w="9525" cap="flat" cmpd="sng" algn="ctr">
                       <a:solidFill>
-                        <a:srgbClr val="F0D1E5"/>
+                        <a:srgbClr val="F6D5EB"/>
                       </a:solidFill>
                       <a:prstDash val="solid"/>
                     </a:lnL>
                     <a:lnR w="9525" cap="flat" cmpd="sng" algn="ctr">
                       <a:solidFill>
-                        <a:srgbClr val="F0D1E5"/>
+                        <a:srgbClr val="F6D5EB"/>
                       </a:solidFill>
                       <a:prstDash val="solid"/>
                     </a:lnR>
                     <a:lnT w="9525" cap="flat" cmpd="sng" algn="ctr">
                       <a:solidFill>
-                        <a:srgbClr val="F0D1E5"/>
+                        <a:srgbClr val="F6D5EB"/>
                       </a:solidFill>
                       <a:prstDash val="solid"/>
                     </a:lnT>
                     <a:lnB w="9525" cap="flat" cmpd="sng" algn="ctr">
                       <a:solidFill>
-                        <a:srgbClr val="F0D1E5"/>
+                        <a:srgbClr val="F6D5EB"/>
                       </a:solidFill>
                       <a:prstDash val="solid"/>
                     </a:lnB>
                     <a:solidFill>
-                      <a:srgbClr val="F0D1E5"/>
+                      <a:srgbClr val="F6D5EB"/>
                     </a:solidFill>
                   </a:tcPr>
                 </a:tc>
@@ -5717,7 +6230,7 @@
                       <a:r>
                         <a:rPr sz="1500" b="0">
                           <a:solidFill>
-                            <a:srgbClr val="2B2B2B"/>
+                            <a:srgbClr val="26231F"/>
                           </a:solidFill>
                         </a:rPr>
                         <a:t>내용 입력</a:t>
@@ -5727,25 +6240,25 @@
                   <a:tcPr anchor="ctr" marL="73152" marR="73152">
                     <a:lnL w="9525" cap="flat" cmpd="sng" algn="ctr">
                       <a:solidFill>
-                        <a:srgbClr val="F0D1E5"/>
+                        <a:srgbClr val="F6D5EB"/>
                       </a:solidFill>
                       <a:prstDash val="solid"/>
                     </a:lnL>
                     <a:lnR w="9525" cap="flat" cmpd="sng" algn="ctr">
                       <a:solidFill>
-                        <a:srgbClr val="F0D1E5"/>
+                        <a:srgbClr val="F6D5EB"/>
                       </a:solidFill>
                       <a:prstDash val="solid"/>
                     </a:lnR>
                     <a:lnT w="9525" cap="flat" cmpd="sng" algn="ctr">
                       <a:solidFill>
-                        <a:srgbClr val="F0D1E5"/>
+                        <a:srgbClr val="F6D5EB"/>
                       </a:solidFill>
                       <a:prstDash val="solid"/>
                     </a:lnT>
                     <a:lnB w="9525" cap="flat" cmpd="sng" algn="ctr">
                       <a:solidFill>
-                        <a:srgbClr val="F0D1E5"/>
+                        <a:srgbClr val="F6D5EB"/>
                       </a:solidFill>
                       <a:prstDash val="solid"/>
                     </a:lnB>
@@ -5763,7 +6276,7 @@
                       <a:r>
                         <a:rPr sz="1500" b="0">
                           <a:solidFill>
-                            <a:srgbClr val="2B2B2B"/>
+                            <a:srgbClr val="26231F"/>
                           </a:solidFill>
                         </a:rPr>
                         <a:t/>
@@ -5773,25 +6286,25 @@
                   <a:tcPr anchor="ctr" marL="73152" marR="73152">
                     <a:lnL w="9525" cap="flat" cmpd="sng" algn="ctr">
                       <a:solidFill>
-                        <a:srgbClr val="F0D1E5"/>
+                        <a:srgbClr val="F6D5EB"/>
                       </a:solidFill>
                       <a:prstDash val="solid"/>
                     </a:lnL>
                     <a:lnR w="9525" cap="flat" cmpd="sng" algn="ctr">
                       <a:solidFill>
-                        <a:srgbClr val="F0D1E5"/>
+                        <a:srgbClr val="F6D5EB"/>
                       </a:solidFill>
                       <a:prstDash val="solid"/>
                     </a:lnR>
                     <a:lnT w="9525" cap="flat" cmpd="sng" algn="ctr">
                       <a:solidFill>
-                        <a:srgbClr val="F0D1E5"/>
+                        <a:srgbClr val="F6D5EB"/>
                       </a:solidFill>
                       <a:prstDash val="solid"/>
                     </a:lnT>
                     <a:lnB w="9525" cap="flat" cmpd="sng" algn="ctr">
                       <a:solidFill>
-                        <a:srgbClr val="F0D1E5"/>
+                        <a:srgbClr val="F6D5EB"/>
                       </a:solidFill>
                       <a:prstDash val="solid"/>
                     </a:lnB>
@@ -5809,7 +6322,7 @@
                       <a:r>
                         <a:rPr sz="1500" b="0">
                           <a:solidFill>
-                            <a:srgbClr val="2B2B2B"/>
+                            <a:srgbClr val="26231F"/>
                           </a:solidFill>
                         </a:rPr>
                         <a:t/>
@@ -5819,25 +6332,25 @@
                   <a:tcPr anchor="ctr" marL="73152" marR="73152">
                     <a:lnL w="9525" cap="flat" cmpd="sng" algn="ctr">
                       <a:solidFill>
-                        <a:srgbClr val="F0D1E5"/>
+                        <a:srgbClr val="F6D5EB"/>
                       </a:solidFill>
                       <a:prstDash val="solid"/>
                     </a:lnL>
                     <a:lnR w="9525" cap="flat" cmpd="sng" algn="ctr">
                       <a:solidFill>
-                        <a:srgbClr val="F0D1E5"/>
+                        <a:srgbClr val="F6D5EB"/>
                       </a:solidFill>
                       <a:prstDash val="solid"/>
                     </a:lnR>
                     <a:lnT w="9525" cap="flat" cmpd="sng" algn="ctr">
                       <a:solidFill>
-                        <a:srgbClr val="F0D1E5"/>
+                        <a:srgbClr val="F6D5EB"/>
                       </a:solidFill>
                       <a:prstDash val="solid"/>
                     </a:lnT>
                     <a:lnB w="9525" cap="flat" cmpd="sng" algn="ctr">
                       <a:solidFill>
-                        <a:srgbClr val="F0D1E5"/>
+                        <a:srgbClr val="F6D5EB"/>
                       </a:solidFill>
                       <a:prstDash val="solid"/>
                     </a:lnB>
@@ -5857,7 +6370,7 @@
                       <a:r>
                         <a:rPr sz="1500" b="1">
                           <a:solidFill>
-                            <a:srgbClr val="85326A"/>
+                            <a:srgbClr val="49273E"/>
                           </a:solidFill>
                         </a:rPr>
                         <a:t>2</a:t>
@@ -5867,30 +6380,30 @@
                   <a:tcPr anchor="ctr" marL="73152" marR="73152">
                     <a:lnL w="9525" cap="flat" cmpd="sng" algn="ctr">
                       <a:solidFill>
-                        <a:srgbClr val="F0D1E5"/>
+                        <a:srgbClr val="F6D5EB"/>
                       </a:solidFill>
                       <a:prstDash val="solid"/>
                     </a:lnL>
                     <a:lnR w="9525" cap="flat" cmpd="sng" algn="ctr">
                       <a:solidFill>
-                        <a:srgbClr val="F0D1E5"/>
+                        <a:srgbClr val="F6D5EB"/>
                       </a:solidFill>
                       <a:prstDash val="solid"/>
                     </a:lnR>
                     <a:lnT w="9525" cap="flat" cmpd="sng" algn="ctr">
                       <a:solidFill>
-                        <a:srgbClr val="F0D1E5"/>
+                        <a:srgbClr val="F6D5EB"/>
                       </a:solidFill>
                       <a:prstDash val="solid"/>
                     </a:lnT>
                     <a:lnB w="9525" cap="flat" cmpd="sng" algn="ctr">
                       <a:solidFill>
-                        <a:srgbClr val="F0D1E5"/>
+                        <a:srgbClr val="F6D5EB"/>
                       </a:solidFill>
                       <a:prstDash val="solid"/>
                     </a:lnB>
                     <a:solidFill>
-                      <a:srgbClr val="F0D1E5"/>
+                      <a:srgbClr val="F6D5EB"/>
                     </a:solidFill>
                   </a:tcPr>
                 </a:tc>
@@ -5903,7 +6416,7 @@
                       <a:r>
                         <a:rPr sz="1500" b="0">
                           <a:solidFill>
-                            <a:srgbClr val="2B2B2B"/>
+                            <a:srgbClr val="26231F"/>
                           </a:solidFill>
                         </a:rPr>
                         <a:t>내용 입력</a:t>
@@ -5913,30 +6426,30 @@
                   <a:tcPr anchor="ctr" marL="73152" marR="73152">
                     <a:lnL w="9525" cap="flat" cmpd="sng" algn="ctr">
                       <a:solidFill>
-                        <a:srgbClr val="F0D1E5"/>
+                        <a:srgbClr val="F6D5EB"/>
                       </a:solidFill>
                       <a:prstDash val="solid"/>
                     </a:lnL>
                     <a:lnR w="9525" cap="flat" cmpd="sng" algn="ctr">
                       <a:solidFill>
-                        <a:srgbClr val="F0D1E5"/>
+                        <a:srgbClr val="F6D5EB"/>
                       </a:solidFill>
                       <a:prstDash val="solid"/>
                     </a:lnR>
                     <a:lnT w="9525" cap="flat" cmpd="sng" algn="ctr">
                       <a:solidFill>
-                        <a:srgbClr val="F0D1E5"/>
+                        <a:srgbClr val="F6D5EB"/>
                       </a:solidFill>
                       <a:prstDash val="solid"/>
                     </a:lnT>
                     <a:lnB w="9525" cap="flat" cmpd="sng" algn="ctr">
                       <a:solidFill>
-                        <a:srgbClr val="F0D1E5"/>
+                        <a:srgbClr val="F6D5EB"/>
                       </a:solidFill>
                       <a:prstDash val="solid"/>
                     </a:lnB>
                     <a:solidFill>
-                      <a:srgbClr val="F9F0F6"/>
+                      <a:srgbClr val="FBECF6"/>
                     </a:solidFill>
                   </a:tcPr>
                 </a:tc>
@@ -5949,7 +6462,7 @@
                       <a:r>
                         <a:rPr sz="1500" b="0">
                           <a:solidFill>
-                            <a:srgbClr val="2B2B2B"/>
+                            <a:srgbClr val="26231F"/>
                           </a:solidFill>
                         </a:rPr>
                         <a:t/>
@@ -5959,30 +6472,30 @@
                   <a:tcPr anchor="ctr" marL="73152" marR="73152">
                     <a:lnL w="9525" cap="flat" cmpd="sng" algn="ctr">
                       <a:solidFill>
-                        <a:srgbClr val="F0D1E5"/>
+                        <a:srgbClr val="F6D5EB"/>
                       </a:solidFill>
                       <a:prstDash val="solid"/>
                     </a:lnL>
                     <a:lnR w="9525" cap="flat" cmpd="sng" algn="ctr">
                       <a:solidFill>
-                        <a:srgbClr val="F0D1E5"/>
+                        <a:srgbClr val="F6D5EB"/>
                       </a:solidFill>
                       <a:prstDash val="solid"/>
                     </a:lnR>
                     <a:lnT w="9525" cap="flat" cmpd="sng" algn="ctr">
                       <a:solidFill>
-                        <a:srgbClr val="F0D1E5"/>
+                        <a:srgbClr val="F6D5EB"/>
                       </a:solidFill>
                       <a:prstDash val="solid"/>
                     </a:lnT>
                     <a:lnB w="9525" cap="flat" cmpd="sng" algn="ctr">
                       <a:solidFill>
-                        <a:srgbClr val="F0D1E5"/>
+                        <a:srgbClr val="F6D5EB"/>
                       </a:solidFill>
                       <a:prstDash val="solid"/>
                     </a:lnB>
                     <a:solidFill>
-                      <a:srgbClr val="F9F0F6"/>
+                      <a:srgbClr val="FBECF6"/>
                     </a:solidFill>
                   </a:tcPr>
                 </a:tc>
@@ -5995,7 +6508,7 @@
                       <a:r>
                         <a:rPr sz="1500" b="0">
                           <a:solidFill>
-                            <a:srgbClr val="2B2B2B"/>
+                            <a:srgbClr val="26231F"/>
                           </a:solidFill>
                         </a:rPr>
                         <a:t/>
@@ -6005,30 +6518,30 @@
                   <a:tcPr anchor="ctr" marL="73152" marR="73152">
                     <a:lnL w="9525" cap="flat" cmpd="sng" algn="ctr">
                       <a:solidFill>
-                        <a:srgbClr val="F0D1E5"/>
+                        <a:srgbClr val="F6D5EB"/>
                       </a:solidFill>
                       <a:prstDash val="solid"/>
                     </a:lnL>
                     <a:lnR w="9525" cap="flat" cmpd="sng" algn="ctr">
                       <a:solidFill>
-                        <a:srgbClr val="F0D1E5"/>
+                        <a:srgbClr val="F6D5EB"/>
                       </a:solidFill>
                       <a:prstDash val="solid"/>
                     </a:lnR>
                     <a:lnT w="9525" cap="flat" cmpd="sng" algn="ctr">
                       <a:solidFill>
-                        <a:srgbClr val="F0D1E5"/>
+                        <a:srgbClr val="F6D5EB"/>
                       </a:solidFill>
                       <a:prstDash val="solid"/>
                     </a:lnT>
                     <a:lnB w="9525" cap="flat" cmpd="sng" algn="ctr">
                       <a:solidFill>
-                        <a:srgbClr val="F0D1E5"/>
+                        <a:srgbClr val="F6D5EB"/>
                       </a:solidFill>
                       <a:prstDash val="solid"/>
                     </a:lnB>
                     <a:solidFill>
-                      <a:srgbClr val="F9F0F6"/>
+                      <a:srgbClr val="FBECF6"/>
                     </a:solidFill>
                   </a:tcPr>
                 </a:tc>
@@ -6043,7 +6556,7 @@
                       <a:r>
                         <a:rPr sz="1500" b="1">
                           <a:solidFill>
-                            <a:srgbClr val="85326A"/>
+                            <a:srgbClr val="49273E"/>
                           </a:solidFill>
                         </a:rPr>
                         <a:t>3</a:t>
@@ -6053,30 +6566,30 @@
                   <a:tcPr anchor="ctr" marL="73152" marR="73152">
                     <a:lnL w="9525" cap="flat" cmpd="sng" algn="ctr">
                       <a:solidFill>
-                        <a:srgbClr val="F0D1E5"/>
+                        <a:srgbClr val="F6D5EB"/>
                       </a:solidFill>
                       <a:prstDash val="solid"/>
                     </a:lnL>
                     <a:lnR w="9525" cap="flat" cmpd="sng" algn="ctr">
                       <a:solidFill>
-                        <a:srgbClr val="F0D1E5"/>
+                        <a:srgbClr val="F6D5EB"/>
                       </a:solidFill>
                       <a:prstDash val="solid"/>
                     </a:lnR>
                     <a:lnT w="9525" cap="flat" cmpd="sng" algn="ctr">
                       <a:solidFill>
-                        <a:srgbClr val="F0D1E5"/>
+                        <a:srgbClr val="F6D5EB"/>
                       </a:solidFill>
                       <a:prstDash val="solid"/>
                     </a:lnT>
                     <a:lnB w="9525" cap="flat" cmpd="sng" algn="ctr">
                       <a:solidFill>
-                        <a:srgbClr val="F0D1E5"/>
+                        <a:srgbClr val="F6D5EB"/>
                       </a:solidFill>
                       <a:prstDash val="solid"/>
                     </a:lnB>
                     <a:solidFill>
-                      <a:srgbClr val="F0D1E5"/>
+                      <a:srgbClr val="F6D5EB"/>
                     </a:solidFill>
                   </a:tcPr>
                 </a:tc>
@@ -6089,7 +6602,7 @@
                       <a:r>
                         <a:rPr sz="1500" b="0">
                           <a:solidFill>
-                            <a:srgbClr val="2B2B2B"/>
+                            <a:srgbClr val="26231F"/>
                           </a:solidFill>
                         </a:rPr>
                         <a:t>내용 입력</a:t>
@@ -6099,25 +6612,25 @@
                   <a:tcPr anchor="ctr" marL="73152" marR="73152">
                     <a:lnL w="9525" cap="flat" cmpd="sng" algn="ctr">
                       <a:solidFill>
-                        <a:srgbClr val="F0D1E5"/>
+                        <a:srgbClr val="F6D5EB"/>
                       </a:solidFill>
                       <a:prstDash val="solid"/>
                     </a:lnL>
                     <a:lnR w="9525" cap="flat" cmpd="sng" algn="ctr">
                       <a:solidFill>
-                        <a:srgbClr val="F0D1E5"/>
+                        <a:srgbClr val="F6D5EB"/>
                       </a:solidFill>
                       <a:prstDash val="solid"/>
                     </a:lnR>
                     <a:lnT w="9525" cap="flat" cmpd="sng" algn="ctr">
                       <a:solidFill>
-                        <a:srgbClr val="F0D1E5"/>
+                        <a:srgbClr val="F6D5EB"/>
                       </a:solidFill>
                       <a:prstDash val="solid"/>
                     </a:lnT>
                     <a:lnB w="9525" cap="flat" cmpd="sng" algn="ctr">
                       <a:solidFill>
-                        <a:srgbClr val="F0D1E5"/>
+                        <a:srgbClr val="F6D5EB"/>
                       </a:solidFill>
                       <a:prstDash val="solid"/>
                     </a:lnB>
@@ -6135,7 +6648,7 @@
                       <a:r>
                         <a:rPr sz="1500" b="0">
                           <a:solidFill>
-                            <a:srgbClr val="2B2B2B"/>
+                            <a:srgbClr val="26231F"/>
                           </a:solidFill>
                         </a:rPr>
                         <a:t/>
@@ -6145,25 +6658,25 @@
                   <a:tcPr anchor="ctr" marL="73152" marR="73152">
                     <a:lnL w="9525" cap="flat" cmpd="sng" algn="ctr">
                       <a:solidFill>
-                        <a:srgbClr val="F0D1E5"/>
+                        <a:srgbClr val="F6D5EB"/>
                       </a:solidFill>
                       <a:prstDash val="solid"/>
                     </a:lnL>
                     <a:lnR w="9525" cap="flat" cmpd="sng" algn="ctr">
                       <a:solidFill>
-                        <a:srgbClr val="F0D1E5"/>
+                        <a:srgbClr val="F6D5EB"/>
                       </a:solidFill>
                       <a:prstDash val="solid"/>
                     </a:lnR>
                     <a:lnT w="9525" cap="flat" cmpd="sng" algn="ctr">
                       <a:solidFill>
-                        <a:srgbClr val="F0D1E5"/>
+                        <a:srgbClr val="F6D5EB"/>
                       </a:solidFill>
                       <a:prstDash val="solid"/>
                     </a:lnT>
                     <a:lnB w="9525" cap="flat" cmpd="sng" algn="ctr">
                       <a:solidFill>
-                        <a:srgbClr val="F0D1E5"/>
+                        <a:srgbClr val="F6D5EB"/>
                       </a:solidFill>
                       <a:prstDash val="solid"/>
                     </a:lnB>
@@ -6181,7 +6694,7 @@
                       <a:r>
                         <a:rPr sz="1500" b="0">
                           <a:solidFill>
-                            <a:srgbClr val="2B2B2B"/>
+                            <a:srgbClr val="26231F"/>
                           </a:solidFill>
                         </a:rPr>
                         <a:t/>
@@ -6191,25 +6704,25 @@
                   <a:tcPr anchor="ctr" marL="73152" marR="73152">
                     <a:lnL w="9525" cap="flat" cmpd="sng" algn="ctr">
                       <a:solidFill>
-                        <a:srgbClr val="F0D1E5"/>
+                        <a:srgbClr val="F6D5EB"/>
                       </a:solidFill>
                       <a:prstDash val="solid"/>
                     </a:lnL>
                     <a:lnR w="9525" cap="flat" cmpd="sng" algn="ctr">
                       <a:solidFill>
-                        <a:srgbClr val="F0D1E5"/>
+                        <a:srgbClr val="F6D5EB"/>
                       </a:solidFill>
                       <a:prstDash val="solid"/>
                     </a:lnR>
                     <a:lnT w="9525" cap="flat" cmpd="sng" algn="ctr">
                       <a:solidFill>
-                        <a:srgbClr val="F0D1E5"/>
+                        <a:srgbClr val="F6D5EB"/>
                       </a:solidFill>
                       <a:prstDash val="solid"/>
                     </a:lnT>
                     <a:lnB w="9525" cap="flat" cmpd="sng" algn="ctr">
                       <a:solidFill>
-                        <a:srgbClr val="F0D1E5"/>
+                        <a:srgbClr val="F6D5EB"/>
                       </a:solidFill>
                       <a:prstDash val="solid"/>
                     </a:lnB>
@@ -6229,7 +6742,7 @@
                       <a:r>
                         <a:rPr sz="1500" b="1">
                           <a:solidFill>
-                            <a:srgbClr val="85326A"/>
+                            <a:srgbClr val="49273E"/>
                           </a:solidFill>
                         </a:rPr>
                         <a:t>4</a:t>
@@ -6239,30 +6752,30 @@
                   <a:tcPr anchor="ctr" marL="73152" marR="73152">
                     <a:lnL w="9525" cap="flat" cmpd="sng" algn="ctr">
                       <a:solidFill>
-                        <a:srgbClr val="F0D1E5"/>
+                        <a:srgbClr val="F6D5EB"/>
                       </a:solidFill>
                       <a:prstDash val="solid"/>
                     </a:lnL>
                     <a:lnR w="9525" cap="flat" cmpd="sng" algn="ctr">
                       <a:solidFill>
-                        <a:srgbClr val="F0D1E5"/>
+                        <a:srgbClr val="F6D5EB"/>
                       </a:solidFill>
                       <a:prstDash val="solid"/>
                     </a:lnR>
                     <a:lnT w="9525" cap="flat" cmpd="sng" algn="ctr">
                       <a:solidFill>
-                        <a:srgbClr val="F0D1E5"/>
+                        <a:srgbClr val="F6D5EB"/>
                       </a:solidFill>
                       <a:prstDash val="solid"/>
                     </a:lnT>
                     <a:lnB w="9525" cap="flat" cmpd="sng" algn="ctr">
                       <a:solidFill>
-                        <a:srgbClr val="F0D1E5"/>
+                        <a:srgbClr val="F6D5EB"/>
                       </a:solidFill>
                       <a:prstDash val="solid"/>
                     </a:lnB>
                     <a:solidFill>
-                      <a:srgbClr val="F0D1E5"/>
+                      <a:srgbClr val="F6D5EB"/>
                     </a:solidFill>
                   </a:tcPr>
                 </a:tc>
@@ -6275,7 +6788,7 @@
                       <a:r>
                         <a:rPr sz="1500" b="0">
                           <a:solidFill>
-                            <a:srgbClr val="2B2B2B"/>
+                            <a:srgbClr val="26231F"/>
                           </a:solidFill>
                         </a:rPr>
                         <a:t>내용 입력</a:t>
@@ -6285,30 +6798,30 @@
                   <a:tcPr anchor="ctr" marL="73152" marR="73152">
                     <a:lnL w="9525" cap="flat" cmpd="sng" algn="ctr">
                       <a:solidFill>
-                        <a:srgbClr val="F0D1E5"/>
+                        <a:srgbClr val="F6D5EB"/>
                       </a:solidFill>
                       <a:prstDash val="solid"/>
                     </a:lnL>
                     <a:lnR w="9525" cap="flat" cmpd="sng" algn="ctr">
                       <a:solidFill>
-                        <a:srgbClr val="F0D1E5"/>
+                        <a:srgbClr val="F6D5EB"/>
                       </a:solidFill>
                       <a:prstDash val="solid"/>
                     </a:lnR>
                     <a:lnT w="9525" cap="flat" cmpd="sng" algn="ctr">
                       <a:solidFill>
-                        <a:srgbClr val="F0D1E5"/>
+                        <a:srgbClr val="F6D5EB"/>
                       </a:solidFill>
                       <a:prstDash val="solid"/>
                     </a:lnT>
                     <a:lnB w="9525" cap="flat" cmpd="sng" algn="ctr">
                       <a:solidFill>
-                        <a:srgbClr val="F0D1E5"/>
+                        <a:srgbClr val="F6D5EB"/>
                       </a:solidFill>
                       <a:prstDash val="solid"/>
                     </a:lnB>
                     <a:solidFill>
-                      <a:srgbClr val="F9F0F6"/>
+                      <a:srgbClr val="FBECF6"/>
                     </a:solidFill>
                   </a:tcPr>
                 </a:tc>
@@ -6321,7 +6834,7 @@
                       <a:r>
                         <a:rPr sz="1500" b="0">
                           <a:solidFill>
-                            <a:srgbClr val="2B2B2B"/>
+                            <a:srgbClr val="26231F"/>
                           </a:solidFill>
                         </a:rPr>
                         <a:t/>
@@ -6331,30 +6844,30 @@
                   <a:tcPr anchor="ctr" marL="73152" marR="73152">
                     <a:lnL w="9525" cap="flat" cmpd="sng" algn="ctr">
                       <a:solidFill>
-                        <a:srgbClr val="F0D1E5"/>
+                        <a:srgbClr val="F6D5EB"/>
                       </a:solidFill>
                       <a:prstDash val="solid"/>
                     </a:lnL>
                     <a:lnR w="9525" cap="flat" cmpd="sng" algn="ctr">
                       <a:solidFill>
-                        <a:srgbClr val="F0D1E5"/>
+                        <a:srgbClr val="F6D5EB"/>
                       </a:solidFill>
                       <a:prstDash val="solid"/>
                     </a:lnR>
                     <a:lnT w="9525" cap="flat" cmpd="sng" algn="ctr">
                       <a:solidFill>
-                        <a:srgbClr val="F0D1E5"/>
+                        <a:srgbClr val="F6D5EB"/>
                       </a:solidFill>
                       <a:prstDash val="solid"/>
                     </a:lnT>
                     <a:lnB w="9525" cap="flat" cmpd="sng" algn="ctr">
                       <a:solidFill>
-                        <a:srgbClr val="F0D1E5"/>
+                        <a:srgbClr val="F6D5EB"/>
                       </a:solidFill>
                       <a:prstDash val="solid"/>
                     </a:lnB>
                     <a:solidFill>
-                      <a:srgbClr val="F9F0F6"/>
+                      <a:srgbClr val="FBECF6"/>
                     </a:solidFill>
                   </a:tcPr>
                 </a:tc>
@@ -6367,7 +6880,7 @@
                       <a:r>
                         <a:rPr sz="1500" b="0">
                           <a:solidFill>
-                            <a:srgbClr val="2B2B2B"/>
+                            <a:srgbClr val="26231F"/>
                           </a:solidFill>
                         </a:rPr>
                         <a:t/>
@@ -6377,30 +6890,30 @@
                   <a:tcPr anchor="ctr" marL="73152" marR="73152">
                     <a:lnL w="9525" cap="flat" cmpd="sng" algn="ctr">
                       <a:solidFill>
-                        <a:srgbClr val="F0D1E5"/>
+                        <a:srgbClr val="F6D5EB"/>
                       </a:solidFill>
                       <a:prstDash val="solid"/>
                     </a:lnL>
                     <a:lnR w="9525" cap="flat" cmpd="sng" algn="ctr">
                       <a:solidFill>
-                        <a:srgbClr val="F0D1E5"/>
+                        <a:srgbClr val="F6D5EB"/>
                       </a:solidFill>
                       <a:prstDash val="solid"/>
                     </a:lnR>
                     <a:lnT w="9525" cap="flat" cmpd="sng" algn="ctr">
                       <a:solidFill>
-                        <a:srgbClr val="F0D1E5"/>
+                        <a:srgbClr val="F6D5EB"/>
                       </a:solidFill>
                       <a:prstDash val="solid"/>
                     </a:lnT>
                     <a:lnB w="9525" cap="flat" cmpd="sng" algn="ctr">
                       <a:solidFill>
-                        <a:srgbClr val="F0D1E5"/>
+                        <a:srgbClr val="F6D5EB"/>
                       </a:solidFill>
                       <a:prstDash val="solid"/>
                     </a:lnB>
                     <a:solidFill>
-                      <a:srgbClr val="F9F0F6"/>
+                      <a:srgbClr val="FBECF6"/>
                     </a:solidFill>
                   </a:tcPr>
                 </a:tc>
@@ -6415,7 +6928,7 @@
                       <a:r>
                         <a:rPr sz="1500" b="1">
                           <a:solidFill>
-                            <a:srgbClr val="85326A"/>
+                            <a:srgbClr val="49273E"/>
                           </a:solidFill>
                         </a:rPr>
                         <a:t>5</a:t>
@@ -6425,30 +6938,30 @@
                   <a:tcPr anchor="ctr" marL="73152" marR="73152">
                     <a:lnL w="9525" cap="flat" cmpd="sng" algn="ctr">
                       <a:solidFill>
-                        <a:srgbClr val="F0D1E5"/>
+                        <a:srgbClr val="F6D5EB"/>
                       </a:solidFill>
                       <a:prstDash val="solid"/>
                     </a:lnL>
                     <a:lnR w="9525" cap="flat" cmpd="sng" algn="ctr">
                       <a:solidFill>
-                        <a:srgbClr val="F0D1E5"/>
+                        <a:srgbClr val="F6D5EB"/>
                       </a:solidFill>
                       <a:prstDash val="solid"/>
                     </a:lnR>
                     <a:lnT w="9525" cap="flat" cmpd="sng" algn="ctr">
                       <a:solidFill>
-                        <a:srgbClr val="F0D1E5"/>
+                        <a:srgbClr val="F6D5EB"/>
                       </a:solidFill>
                       <a:prstDash val="solid"/>
                     </a:lnT>
                     <a:lnB w="9525" cap="flat" cmpd="sng" algn="ctr">
                       <a:solidFill>
-                        <a:srgbClr val="F0D1E5"/>
+                        <a:srgbClr val="F6D5EB"/>
                       </a:solidFill>
                       <a:prstDash val="solid"/>
                     </a:lnB>
                     <a:solidFill>
-                      <a:srgbClr val="F0D1E5"/>
+                      <a:srgbClr val="F6D5EB"/>
                     </a:solidFill>
                   </a:tcPr>
                 </a:tc>
@@ -6461,7 +6974,7 @@
                       <a:r>
                         <a:rPr sz="1500" b="0">
                           <a:solidFill>
-                            <a:srgbClr val="2B2B2B"/>
+                            <a:srgbClr val="26231F"/>
                           </a:solidFill>
                         </a:rPr>
                         <a:t>내용 입력</a:t>
@@ -6471,25 +6984,25 @@
                   <a:tcPr anchor="ctr" marL="73152" marR="73152">
                     <a:lnL w="9525" cap="flat" cmpd="sng" algn="ctr">
                       <a:solidFill>
-                        <a:srgbClr val="F0D1E5"/>
+                        <a:srgbClr val="F6D5EB"/>
                       </a:solidFill>
                       <a:prstDash val="solid"/>
                     </a:lnL>
                     <a:lnR w="9525" cap="flat" cmpd="sng" algn="ctr">
                       <a:solidFill>
-                        <a:srgbClr val="F0D1E5"/>
+                        <a:srgbClr val="F6D5EB"/>
                       </a:solidFill>
                       <a:prstDash val="solid"/>
                     </a:lnR>
                     <a:lnT w="9525" cap="flat" cmpd="sng" algn="ctr">
                       <a:solidFill>
-                        <a:srgbClr val="F0D1E5"/>
+                        <a:srgbClr val="F6D5EB"/>
                       </a:solidFill>
                       <a:prstDash val="solid"/>
                     </a:lnT>
                     <a:lnB w="9525" cap="flat" cmpd="sng" algn="ctr">
                       <a:solidFill>
-                        <a:srgbClr val="F0D1E5"/>
+                        <a:srgbClr val="F6D5EB"/>
                       </a:solidFill>
                       <a:prstDash val="solid"/>
                     </a:lnB>
@@ -6507,7 +7020,7 @@
                       <a:r>
                         <a:rPr sz="1500" b="0">
                           <a:solidFill>
-                            <a:srgbClr val="2B2B2B"/>
+                            <a:srgbClr val="26231F"/>
                           </a:solidFill>
                         </a:rPr>
                         <a:t/>
@@ -6517,25 +7030,25 @@
                   <a:tcPr anchor="ctr" marL="73152" marR="73152">
                     <a:lnL w="9525" cap="flat" cmpd="sng" algn="ctr">
                       <a:solidFill>
-                        <a:srgbClr val="F0D1E5"/>
+                        <a:srgbClr val="F6D5EB"/>
                       </a:solidFill>
                       <a:prstDash val="solid"/>
                     </a:lnL>
                     <a:lnR w="9525" cap="flat" cmpd="sng" algn="ctr">
                       <a:solidFill>
-                        <a:srgbClr val="F0D1E5"/>
+                        <a:srgbClr val="F6D5EB"/>
                       </a:solidFill>
                       <a:prstDash val="solid"/>
                     </a:lnR>
                     <a:lnT w="9525" cap="flat" cmpd="sng" algn="ctr">
                       <a:solidFill>
-                        <a:srgbClr val="F0D1E5"/>
+                        <a:srgbClr val="F6D5EB"/>
                       </a:solidFill>
                       <a:prstDash val="solid"/>
                     </a:lnT>
                     <a:lnB w="9525" cap="flat" cmpd="sng" algn="ctr">
                       <a:solidFill>
-                        <a:srgbClr val="F0D1E5"/>
+                        <a:srgbClr val="F6D5EB"/>
                       </a:solidFill>
                       <a:prstDash val="solid"/>
                     </a:lnB>
@@ -6553,7 +7066,7 @@
                       <a:r>
                         <a:rPr sz="1500" b="0">
                           <a:solidFill>
-                            <a:srgbClr val="2B2B2B"/>
+                            <a:srgbClr val="26231F"/>
                           </a:solidFill>
                         </a:rPr>
                         <a:t/>
@@ -6563,25 +7076,25 @@
                   <a:tcPr anchor="ctr" marL="73152" marR="73152">
                     <a:lnL w="9525" cap="flat" cmpd="sng" algn="ctr">
                       <a:solidFill>
-                        <a:srgbClr val="F0D1E5"/>
+                        <a:srgbClr val="F6D5EB"/>
                       </a:solidFill>
                       <a:prstDash val="solid"/>
                     </a:lnL>
                     <a:lnR w="9525" cap="flat" cmpd="sng" algn="ctr">
                       <a:solidFill>
-                        <a:srgbClr val="F0D1E5"/>
+                        <a:srgbClr val="F6D5EB"/>
                       </a:solidFill>
                       <a:prstDash val="solid"/>
                     </a:lnR>
                     <a:lnT w="9525" cap="flat" cmpd="sng" algn="ctr">
                       <a:solidFill>
-                        <a:srgbClr val="F0D1E5"/>
+                        <a:srgbClr val="F6D5EB"/>
                       </a:solidFill>
                       <a:prstDash val="solid"/>
                     </a:lnT>
                     <a:lnB w="9525" cap="flat" cmpd="sng" algn="ctr">
                       <a:solidFill>
-                        <a:srgbClr val="F0D1E5"/>
+                        <a:srgbClr val="F6D5EB"/>
                       </a:solidFill>
                       <a:prstDash val="solid"/>
                     </a:lnB>
@@ -6606,6 +7119,14 @@
 <file path=ppt/slides/slide6.xml><?xml version="1.0" encoding="utf-8"?>
 <p:sld xmlns:a="http://schemas.openxmlformats.org/drawingml/2006/main" xmlns:p="http://schemas.openxmlformats.org/presentationml/2006/main" xmlns:r="http://schemas.openxmlformats.org/officeDocument/2006/relationships">
   <p:cSld>
+    <p:bg>
+      <p:bgPr>
+        <a:solidFill>
+          <a:srgbClr val="49273E"/>
+        </a:solidFill>
+        <a:effectLst/>
+      </p:bgPr>
+    </p:bg>
     <p:spTree>
       <p:nvGrpSpPr>
         <p:cNvPr id="1" name=""/>
@@ -6613,30 +7134,140 @@
         <p:nvPr/>
       </p:nvGrpSpPr>
       <p:grpSpPr/>
-      <p:pic>
-        <p:nvPicPr>
-          <p:cNvPr id="3" name="표지 그림" descr="talk-26.jpg"/>
-          <p:cNvPicPr>
-            <a:picLocks noChangeAspect="1"/>
-          </p:cNvPicPr>
+      <p:sp>
+        <p:nvSpPr>
+          <p:cNvPr id="3" name="장식"/>
+          <p:cNvSpPr/>
           <p:nvPr/>
-        </p:nvPicPr>
-        <p:blipFill>
-          <a:blip r:embed="rId2"/>
-          <a:stretch>
-            <a:fillRect/>
-          </a:stretch>
-        </p:blipFill>
-        <p:spPr>
-          <a:xfrm>
-            <a:off x="0" y="0"/>
-            <a:ext cx="12191695" cy="6858000"/>
+        </p:nvSpPr>
+        <p:spPr>
+          <a:xfrm>
+            <a:off x="6827349" y="2057400"/>
+            <a:ext cx="1463003" cy="4800600"/>
+          </a:xfrm>
+          <a:prstGeom prst="round2SameRect">
+            <a:avLst>
+              <a:gd name="adj1" fmla="val 50000"/>
+              <a:gd name="adj2" fmla="val 0"/>
+            </a:avLst>
+          </a:prstGeom>
+          <a:solidFill>
+            <a:srgbClr val="A65C8D"/>
+          </a:solidFill>
+          <a:ln>
+            <a:noFill/>
+          </a:ln>
+        </p:spPr>
+        <p:txBody>
+          <a:bodyPr rtlCol="0" anchor="ctr"/>
+          <a:lstStyle/>
+          <a:p>
+            <a:pPr algn="ctr"/>
+          </a:p>
+        </p:txBody>
+      </p:sp>
+      <p:sp>
+        <p:nvSpPr>
+          <p:cNvPr id="4" name="장식"/>
+          <p:cNvSpPr/>
+          <p:nvPr/>
+        </p:nvSpPr>
+        <p:spPr>
+          <a:xfrm>
+            <a:off x="8412269" y="1577339"/>
+            <a:ext cx="1463003" cy="5280660"/>
+          </a:xfrm>
+          <a:prstGeom prst="round2SameRect">
+            <a:avLst>
+              <a:gd name="adj1" fmla="val 50000"/>
+              <a:gd name="adj2" fmla="val 0"/>
+            </a:avLst>
+          </a:prstGeom>
+          <a:solidFill>
+            <a:srgbClr val="D879B8"/>
+          </a:solidFill>
+          <a:ln>
+            <a:noFill/>
+          </a:ln>
+        </p:spPr>
+        <p:txBody>
+          <a:bodyPr rtlCol="0" anchor="ctr"/>
+          <a:lstStyle/>
+          <a:p>
+            <a:pPr algn="ctr"/>
+          </a:p>
+        </p:txBody>
+      </p:sp>
+      <p:sp>
+        <p:nvSpPr>
+          <p:cNvPr id="5" name="장식"/>
+          <p:cNvSpPr/>
+          <p:nvPr/>
+        </p:nvSpPr>
+        <p:spPr>
+          <a:xfrm>
+            <a:off x="9997190" y="1097279"/>
+            <a:ext cx="1463003" cy="5760720"/>
+          </a:xfrm>
+          <a:prstGeom prst="round2SameRect">
+            <a:avLst>
+              <a:gd name="adj1" fmla="val 50000"/>
+              <a:gd name="adj2" fmla="val 0"/>
+            </a:avLst>
+          </a:prstGeom>
+          <a:solidFill>
+            <a:srgbClr val="A65C8D"/>
+          </a:solidFill>
+          <a:ln>
+            <a:noFill/>
+          </a:ln>
+        </p:spPr>
+        <p:txBody>
+          <a:bodyPr rtlCol="0" anchor="ctr"/>
+          <a:lstStyle/>
+          <a:p>
+            <a:pPr algn="ctr"/>
+          </a:p>
+        </p:txBody>
+      </p:sp>
+      <p:sp>
+        <p:nvSpPr>
+          <p:cNvPr id="6" name="라벨"/>
+          <p:cNvSpPr txBox="1"/>
+          <p:nvPr/>
+        </p:nvSpPr>
+        <p:spPr>
+          <a:xfrm>
+            <a:off x="822960" y="2148840"/>
+            <a:ext cx="5608179" cy="274320"/>
           </a:xfrm>
           <a:prstGeom prst="rect">
             <a:avLst/>
           </a:prstGeom>
-        </p:spPr>
-      </p:pic>
+          <a:noFill/>
+        </p:spPr>
+        <p:txBody>
+          <a:bodyPr wrap="square" lIns="54864" rIns="54864" tIns="27432" bIns="27432" anchor="t">
+            <a:noAutofit/>
+          </a:bodyPr>
+          <a:lstStyle/>
+          <a:p>
+            <a:pPr algn="l">
+              <a:lnSpc>
+                <a:spcPct val="115000"/>
+              </a:lnSpc>
+            </a:pPr>
+            <a:r>
+              <a:rPr sz="1000" b="1" i="0" spc="250">
+                <a:solidFill>
+                  <a:srgbClr val="FFFFFF"/>
+                </a:solidFill>
+              </a:rPr>
+              <a:t>PRESENTATION</a:t>
+            </a:r>
+          </a:p>
+        </p:txBody>
+      </p:sp>
       <p:sp>
         <p:nvSpPr>
           <p:cNvPr id="2" name="Title 1"/>
@@ -6649,8 +7280,8 @@
         </p:nvSpPr>
         <p:spPr>
           <a:xfrm>
-            <a:off x="853418" y="2057400"/>
-            <a:ext cx="6095847" cy="1554480"/>
+            <a:off x="822960" y="2606040"/>
+            <a:ext cx="5608179" cy="1188720"/>
           </a:xfrm>
         </p:spPr>
         <p:txBody>
@@ -6665,9 +7296,9 @@
               </a:lnSpc>
             </a:pPr>
             <a:r>
-              <a:rPr sz="3600" b="1" i="0">
+              <a:rPr sz="4000" b="1" i="0">
                 <a:solidFill>
-                  <a:srgbClr val="85326A"/>
+                  <a:srgbClr val="FFFFFF"/>
                 </a:solidFill>
               </a:rPr>
               <a:t>감사합니다</a:t>
@@ -6677,14 +7308,14 @@
       </p:sp>
       <p:sp>
         <p:nvSpPr>
-          <p:cNvPr id="4" name="한 줄 문구"/>
+          <p:cNvPr id="7" name="한 줄 문구"/>
           <p:cNvSpPr txBox="1"/>
           <p:nvPr/>
         </p:nvSpPr>
         <p:spPr>
           <a:xfrm>
-            <a:off x="853418" y="3749039"/>
-            <a:ext cx="6095847" cy="822960"/>
+            <a:off x="822960" y="3886200"/>
+            <a:ext cx="5608179" cy="822960"/>
           </a:xfrm>
           <a:prstGeom prst="rect">
             <a:avLst/>
@@ -6703,9 +7334,9 @@
               </a:lnSpc>
             </a:pPr>
             <a:r>
-              <a:rPr sz="1700" b="0" i="1">
+              <a:rPr sz="1700" b="0" i="0">
                 <a:solidFill>
-                  <a:srgbClr val="85326A"/>
+                  <a:srgbClr val="FFFFFF"/>
                 </a:solidFill>
               </a:rPr>
               <a:t>끝까지 들어 주셔서 고맙습니다</a:t>
@@ -6715,14 +7346,14 @@
       </p:sp>
       <p:sp>
         <p:nvSpPr>
-          <p:cNvPr id="5" name="안내 문구"/>
+          <p:cNvPr id="8" name="안내 문구"/>
           <p:cNvSpPr txBox="1"/>
           <p:nvPr/>
         </p:nvSpPr>
         <p:spPr>
           <a:xfrm>
-            <a:off x="853418" y="4617720"/>
-            <a:ext cx="6095847" cy="914400"/>
+            <a:off x="822960" y="4754880"/>
+            <a:ext cx="5608179" cy="914400"/>
           </a:xfrm>
           <a:prstGeom prst="rect">
             <a:avLst/>
@@ -6743,7 +7374,7 @@
             <a:r>
               <a:rPr sz="1400" b="0" i="0">
                 <a:solidFill>
-                  <a:srgbClr val="666666"/>
+                  <a:srgbClr val="FFFFFF"/>
                 </a:solidFill>
               </a:rPr>
               <a:t>문의 · 연락처를 입력하세요</a:t>
@@ -6770,34 +7401,34 @@
         <a:sysClr val="window" lastClr="FFFFFF"/>
       </a:lt1>
       <a:dk2>
-        <a:srgbClr val="85326A"/>
+        <a:srgbClr val="49273E"/>
       </a:dk2>
       <a:lt2>
-        <a:srgbClr val="F9F0F6"/>
+        <a:srgbClr val="FBECF6"/>
       </a:lt2>
       <a:accent1>
-        <a:srgbClr val="C15CA0"/>
+        <a:srgbClr val="D879B8"/>
       </a:accent1>
       <a:accent2>
-        <a:srgbClr val="49913B"/>
+        <a:srgbClr val="E198A7"/>
       </a:accent2>
       <a:accent3>
-        <a:srgbClr val="85326A"/>
+        <a:srgbClr val="49273E"/>
       </a:accent3>
       <a:accent4>
-        <a:srgbClr val="F0D1E5"/>
+        <a:srgbClr val="F6D5EB"/>
       </a:accent4>
       <a:accent5>
-        <a:srgbClr val="85766E"/>
+        <a:srgbClr val="DC88B0"/>
       </a:accent5>
       <a:accent6>
-        <a:srgbClr val="B684A6"/>
+        <a:srgbClr val="927D8B"/>
       </a:accent6>
       <a:hlink>
-        <a:srgbClr val="C15CA0"/>
+        <a:srgbClr val="D879B8"/>
       </a:hlink>
       <a:folHlink>
-        <a:srgbClr val="85326A"/>
+        <a:srgbClr val="49273E"/>
       </a:folHlink>
     </a:clrScheme>
     <a:fontScheme name="Office">
